--- a/docs/DAILY_PATTERN_POLICY_TOOLCALL_ISSUE.pptx
+++ b/docs/DAILY_PATTERN_POLICY_TOOLCALL_ISSUE.pptx
@@ -134,7 +134,7 @@
           <p:cNvPr id="2" name="제목 1">
             <a:extLst>
               <a:ext uri="{FF2B5EF4-FFF2-40B4-BE49-F238E27FC236}">
-                <a16:creationId xmlns:a16="http://schemas.microsoft.com/office/drawing/2014/main" id="{289B360C-C615-F4E4-B71E-22A1078F9071}"/>
+                <a16:creationId xmlns:a16="http://schemas.microsoft.com/office/drawing/2014/main" id="{873286D7-6B90-7671-367D-35E1D2BE8957}"/>
               </a:ext>
             </a:extLst>
           </p:cNvPr>
@@ -171,7 +171,7 @@
           <p:cNvPr id="3" name="부제목 2">
             <a:extLst>
               <a:ext uri="{FF2B5EF4-FFF2-40B4-BE49-F238E27FC236}">
-                <a16:creationId xmlns:a16="http://schemas.microsoft.com/office/drawing/2014/main" id="{ADAC08C1-271C-06D7-6301-C634AB8FD47C}"/>
+                <a16:creationId xmlns:a16="http://schemas.microsoft.com/office/drawing/2014/main" id="{8BFD3305-C282-D5AB-426D-DE5BB7EB4FEA}"/>
               </a:ext>
             </a:extLst>
           </p:cNvPr>
@@ -241,7 +241,7 @@
           <p:cNvPr id="4" name="날짜 개체 틀 3">
             <a:extLst>
               <a:ext uri="{FF2B5EF4-FFF2-40B4-BE49-F238E27FC236}">
-                <a16:creationId xmlns:a16="http://schemas.microsoft.com/office/drawing/2014/main" id="{941D4395-FE0F-29BF-6889-9A5C5EBB8C6C}"/>
+                <a16:creationId xmlns:a16="http://schemas.microsoft.com/office/drawing/2014/main" id="{9E192BFE-DE99-D5F9-A8E5-BF2A5549F9C2}"/>
               </a:ext>
             </a:extLst>
           </p:cNvPr>
@@ -257,9 +257,9 @@
           <a:bodyPr/>
           <a:lstStyle/>
           <a:p>
-            <a:fld id="{3773AF33-02E8-4DCD-977D-6D89AD3CC8C6}" type="datetimeFigureOut">
+            <a:fld id="{3F69C512-D67E-4864-9B91-3D1BA57AAD11}" type="datetimeFigureOut">
               <a:rPr lang="ko-KR" altLang="en-US" smtClean="0"/>
-              <a:t>2026-05-18</a:t>
+              <a:t>2026-07-29</a:t>
             </a:fld>
             <a:endParaRPr lang="ko-KR" altLang="en-US"/>
           </a:p>
@@ -270,7 +270,7 @@
           <p:cNvPr id="5" name="바닥글 개체 틀 4">
             <a:extLst>
               <a:ext uri="{FF2B5EF4-FFF2-40B4-BE49-F238E27FC236}">
-                <a16:creationId xmlns:a16="http://schemas.microsoft.com/office/drawing/2014/main" id="{54258067-034D-18C0-13D0-CD8E25AE0629}"/>
+                <a16:creationId xmlns:a16="http://schemas.microsoft.com/office/drawing/2014/main" id="{C687DDF6-63AF-E6B0-9C3C-9406B5588B0C}"/>
               </a:ext>
             </a:extLst>
           </p:cNvPr>
@@ -295,7 +295,7 @@
           <p:cNvPr id="6" name="슬라이드 번호 개체 틀 5">
             <a:extLst>
               <a:ext uri="{FF2B5EF4-FFF2-40B4-BE49-F238E27FC236}">
-                <a16:creationId xmlns:a16="http://schemas.microsoft.com/office/drawing/2014/main" id="{4675A4F2-9B26-427A-B743-F5AA97441BC1}"/>
+                <a16:creationId xmlns:a16="http://schemas.microsoft.com/office/drawing/2014/main" id="{7C662857-5020-E78B-5994-8AF953647A09}"/>
               </a:ext>
             </a:extLst>
           </p:cNvPr>
@@ -311,7 +311,7 @@
           <a:bodyPr/>
           <a:lstStyle/>
           <a:p>
-            <a:fld id="{DD851787-D415-4597-836C-BBB5D52CCA72}" type="slidenum">
+            <a:fld id="{AD30F524-F221-4BF1-8367-8122B5DD0B3F}" type="slidenum">
               <a:rPr lang="ko-KR" altLang="en-US" smtClean="0"/>
               <a:t>‹#›</a:t>
             </a:fld>
@@ -322,7 +322,7 @@
     </p:spTree>
     <p:extLst>
       <p:ext uri="{BB962C8B-B14F-4D97-AF65-F5344CB8AC3E}">
-        <p14:creationId xmlns:p14="http://schemas.microsoft.com/office/powerpoint/2010/main" val="1605185946"/>
+        <p14:creationId xmlns:p14="http://schemas.microsoft.com/office/powerpoint/2010/main" val="1066220334"/>
       </p:ext>
     </p:extLst>
   </p:cSld>
@@ -354,7 +354,7 @@
           <p:cNvPr id="2" name="제목 1">
             <a:extLst>
               <a:ext uri="{FF2B5EF4-FFF2-40B4-BE49-F238E27FC236}">
-                <a16:creationId xmlns:a16="http://schemas.microsoft.com/office/drawing/2014/main" id="{06FDE57F-BFBB-1A17-35E5-266255BA00FA}"/>
+                <a16:creationId xmlns:a16="http://schemas.microsoft.com/office/drawing/2014/main" id="{9EE687CA-ABD0-8392-8471-96E203C7B929}"/>
               </a:ext>
             </a:extLst>
           </p:cNvPr>
@@ -382,7 +382,7 @@
           <p:cNvPr id="3" name="세로 텍스트 개체 틀 2">
             <a:extLst>
               <a:ext uri="{FF2B5EF4-FFF2-40B4-BE49-F238E27FC236}">
-                <a16:creationId xmlns:a16="http://schemas.microsoft.com/office/drawing/2014/main" id="{46DCB3B3-71FD-F6F6-6BD6-46CD1F722770}"/>
+                <a16:creationId xmlns:a16="http://schemas.microsoft.com/office/drawing/2014/main" id="{AF4657BA-10A8-EFE7-8BF5-BDA782144A0E}"/>
               </a:ext>
             </a:extLst>
           </p:cNvPr>
@@ -439,7 +439,7 @@
           <p:cNvPr id="4" name="날짜 개체 틀 3">
             <a:extLst>
               <a:ext uri="{FF2B5EF4-FFF2-40B4-BE49-F238E27FC236}">
-                <a16:creationId xmlns:a16="http://schemas.microsoft.com/office/drawing/2014/main" id="{84A4BF1B-BD2A-0E13-92E1-9212966CF639}"/>
+                <a16:creationId xmlns:a16="http://schemas.microsoft.com/office/drawing/2014/main" id="{CC469EFE-6044-EF7A-BDA9-E484B9395B68}"/>
               </a:ext>
             </a:extLst>
           </p:cNvPr>
@@ -455,9 +455,9 @@
           <a:bodyPr/>
           <a:lstStyle/>
           <a:p>
-            <a:fld id="{3773AF33-02E8-4DCD-977D-6D89AD3CC8C6}" type="datetimeFigureOut">
+            <a:fld id="{3F69C512-D67E-4864-9B91-3D1BA57AAD11}" type="datetimeFigureOut">
               <a:rPr lang="ko-KR" altLang="en-US" smtClean="0"/>
-              <a:t>2026-05-18</a:t>
+              <a:t>2026-07-29</a:t>
             </a:fld>
             <a:endParaRPr lang="ko-KR" altLang="en-US"/>
           </a:p>
@@ -468,7 +468,7 @@
           <p:cNvPr id="5" name="바닥글 개체 틀 4">
             <a:extLst>
               <a:ext uri="{FF2B5EF4-FFF2-40B4-BE49-F238E27FC236}">
-                <a16:creationId xmlns:a16="http://schemas.microsoft.com/office/drawing/2014/main" id="{A60BDE9E-9096-45C4-5ABB-D5F15BA4D429}"/>
+                <a16:creationId xmlns:a16="http://schemas.microsoft.com/office/drawing/2014/main" id="{87540B19-2BCF-D91C-B71C-FABE684B625C}"/>
               </a:ext>
             </a:extLst>
           </p:cNvPr>
@@ -493,7 +493,7 @@
           <p:cNvPr id="6" name="슬라이드 번호 개체 틀 5">
             <a:extLst>
               <a:ext uri="{FF2B5EF4-FFF2-40B4-BE49-F238E27FC236}">
-                <a16:creationId xmlns:a16="http://schemas.microsoft.com/office/drawing/2014/main" id="{985624D3-3BAF-707D-57AD-E457E73F9444}"/>
+                <a16:creationId xmlns:a16="http://schemas.microsoft.com/office/drawing/2014/main" id="{296CBD0E-BC2E-4046-9E78-C619A73A721E}"/>
               </a:ext>
             </a:extLst>
           </p:cNvPr>
@@ -509,7 +509,7 @@
           <a:bodyPr/>
           <a:lstStyle/>
           <a:p>
-            <a:fld id="{DD851787-D415-4597-836C-BBB5D52CCA72}" type="slidenum">
+            <a:fld id="{AD30F524-F221-4BF1-8367-8122B5DD0B3F}" type="slidenum">
               <a:rPr lang="ko-KR" altLang="en-US" smtClean="0"/>
               <a:t>‹#›</a:t>
             </a:fld>
@@ -520,7 +520,7 @@
     </p:spTree>
     <p:extLst>
       <p:ext uri="{BB962C8B-B14F-4D97-AF65-F5344CB8AC3E}">
-        <p14:creationId xmlns:p14="http://schemas.microsoft.com/office/powerpoint/2010/main" val="3700995295"/>
+        <p14:creationId xmlns:p14="http://schemas.microsoft.com/office/powerpoint/2010/main" val="3687186942"/>
       </p:ext>
     </p:extLst>
   </p:cSld>
@@ -552,7 +552,7 @@
           <p:cNvPr id="2" name="세로 제목 1">
             <a:extLst>
               <a:ext uri="{FF2B5EF4-FFF2-40B4-BE49-F238E27FC236}">
-                <a16:creationId xmlns:a16="http://schemas.microsoft.com/office/drawing/2014/main" id="{3152F633-49C5-1ACF-49AC-49AA902D2B22}"/>
+                <a16:creationId xmlns:a16="http://schemas.microsoft.com/office/drawing/2014/main" id="{B2DDCA2E-2DD5-C6AF-6432-7E3B2A35450D}"/>
               </a:ext>
             </a:extLst>
           </p:cNvPr>
@@ -585,7 +585,7 @@
           <p:cNvPr id="3" name="세로 텍스트 개체 틀 2">
             <a:extLst>
               <a:ext uri="{FF2B5EF4-FFF2-40B4-BE49-F238E27FC236}">
-                <a16:creationId xmlns:a16="http://schemas.microsoft.com/office/drawing/2014/main" id="{916B2504-A643-2782-22E8-620611F94AF2}"/>
+                <a16:creationId xmlns:a16="http://schemas.microsoft.com/office/drawing/2014/main" id="{FD1D9623-E1B5-F211-7F56-7F0408366064}"/>
               </a:ext>
             </a:extLst>
           </p:cNvPr>
@@ -647,7 +647,7 @@
           <p:cNvPr id="4" name="날짜 개체 틀 3">
             <a:extLst>
               <a:ext uri="{FF2B5EF4-FFF2-40B4-BE49-F238E27FC236}">
-                <a16:creationId xmlns:a16="http://schemas.microsoft.com/office/drawing/2014/main" id="{5FFA64C4-A798-EC3B-D027-254614994592}"/>
+                <a16:creationId xmlns:a16="http://schemas.microsoft.com/office/drawing/2014/main" id="{24447E5A-FCC0-CA65-9245-DCA90C238600}"/>
               </a:ext>
             </a:extLst>
           </p:cNvPr>
@@ -663,9 +663,9 @@
           <a:bodyPr/>
           <a:lstStyle/>
           <a:p>
-            <a:fld id="{3773AF33-02E8-4DCD-977D-6D89AD3CC8C6}" type="datetimeFigureOut">
+            <a:fld id="{3F69C512-D67E-4864-9B91-3D1BA57AAD11}" type="datetimeFigureOut">
               <a:rPr lang="ko-KR" altLang="en-US" smtClean="0"/>
-              <a:t>2026-05-18</a:t>
+              <a:t>2026-07-29</a:t>
             </a:fld>
             <a:endParaRPr lang="ko-KR" altLang="en-US"/>
           </a:p>
@@ -676,7 +676,7 @@
           <p:cNvPr id="5" name="바닥글 개체 틀 4">
             <a:extLst>
               <a:ext uri="{FF2B5EF4-FFF2-40B4-BE49-F238E27FC236}">
-                <a16:creationId xmlns:a16="http://schemas.microsoft.com/office/drawing/2014/main" id="{8200CC05-23CA-C815-7A7D-88DA4B8491C2}"/>
+                <a16:creationId xmlns:a16="http://schemas.microsoft.com/office/drawing/2014/main" id="{67A67D41-11AC-5305-C5C7-DE343D68B202}"/>
               </a:ext>
             </a:extLst>
           </p:cNvPr>
@@ -701,7 +701,7 @@
           <p:cNvPr id="6" name="슬라이드 번호 개체 틀 5">
             <a:extLst>
               <a:ext uri="{FF2B5EF4-FFF2-40B4-BE49-F238E27FC236}">
-                <a16:creationId xmlns:a16="http://schemas.microsoft.com/office/drawing/2014/main" id="{0FDE8BBB-0DEA-2072-9F9C-DFF52BAD4F89}"/>
+                <a16:creationId xmlns:a16="http://schemas.microsoft.com/office/drawing/2014/main" id="{14F2A2B8-D826-6F10-9377-E742DBF7C934}"/>
               </a:ext>
             </a:extLst>
           </p:cNvPr>
@@ -717,7 +717,7 @@
           <a:bodyPr/>
           <a:lstStyle/>
           <a:p>
-            <a:fld id="{DD851787-D415-4597-836C-BBB5D52CCA72}" type="slidenum">
+            <a:fld id="{AD30F524-F221-4BF1-8367-8122B5DD0B3F}" type="slidenum">
               <a:rPr lang="ko-KR" altLang="en-US" smtClean="0"/>
               <a:t>‹#›</a:t>
             </a:fld>
@@ -728,7 +728,7 @@
     </p:spTree>
     <p:extLst>
       <p:ext uri="{BB962C8B-B14F-4D97-AF65-F5344CB8AC3E}">
-        <p14:creationId xmlns:p14="http://schemas.microsoft.com/office/powerpoint/2010/main" val="947661691"/>
+        <p14:creationId xmlns:p14="http://schemas.microsoft.com/office/powerpoint/2010/main" val="1592224510"/>
       </p:ext>
     </p:extLst>
   </p:cSld>
@@ -760,7 +760,7 @@
           <p:cNvPr id="2" name="제목 1">
             <a:extLst>
               <a:ext uri="{FF2B5EF4-FFF2-40B4-BE49-F238E27FC236}">
-                <a16:creationId xmlns:a16="http://schemas.microsoft.com/office/drawing/2014/main" id="{827313A4-AF9E-E385-8A92-761903F40962}"/>
+                <a16:creationId xmlns:a16="http://schemas.microsoft.com/office/drawing/2014/main" id="{AE0EEA7A-C4A3-8D3E-F576-2B75803AF942}"/>
               </a:ext>
             </a:extLst>
           </p:cNvPr>
@@ -788,7 +788,7 @@
           <p:cNvPr id="3" name="내용 개체 틀 2">
             <a:extLst>
               <a:ext uri="{FF2B5EF4-FFF2-40B4-BE49-F238E27FC236}">
-                <a16:creationId xmlns:a16="http://schemas.microsoft.com/office/drawing/2014/main" id="{8ADABADD-B7A2-FB39-63BF-DB96B1E9E431}"/>
+                <a16:creationId xmlns:a16="http://schemas.microsoft.com/office/drawing/2014/main" id="{57032905-3A2B-5949-78E6-C77EDB6F89A2}"/>
               </a:ext>
             </a:extLst>
           </p:cNvPr>
@@ -845,7 +845,7 @@
           <p:cNvPr id="4" name="날짜 개체 틀 3">
             <a:extLst>
               <a:ext uri="{FF2B5EF4-FFF2-40B4-BE49-F238E27FC236}">
-                <a16:creationId xmlns:a16="http://schemas.microsoft.com/office/drawing/2014/main" id="{77D06C3E-F603-F779-9FA6-1F569AD713AF}"/>
+                <a16:creationId xmlns:a16="http://schemas.microsoft.com/office/drawing/2014/main" id="{3BF2C2C3-FA87-4EB9-5725-D68C673AFA73}"/>
               </a:ext>
             </a:extLst>
           </p:cNvPr>
@@ -861,9 +861,9 @@
           <a:bodyPr/>
           <a:lstStyle/>
           <a:p>
-            <a:fld id="{3773AF33-02E8-4DCD-977D-6D89AD3CC8C6}" type="datetimeFigureOut">
+            <a:fld id="{3F69C512-D67E-4864-9B91-3D1BA57AAD11}" type="datetimeFigureOut">
               <a:rPr lang="ko-KR" altLang="en-US" smtClean="0"/>
-              <a:t>2026-05-18</a:t>
+              <a:t>2026-07-29</a:t>
             </a:fld>
             <a:endParaRPr lang="ko-KR" altLang="en-US"/>
           </a:p>
@@ -874,7 +874,7 @@
           <p:cNvPr id="5" name="바닥글 개체 틀 4">
             <a:extLst>
               <a:ext uri="{FF2B5EF4-FFF2-40B4-BE49-F238E27FC236}">
-                <a16:creationId xmlns:a16="http://schemas.microsoft.com/office/drawing/2014/main" id="{D7C3E34B-0DD2-5AD6-0BD5-C72E58BBBF00}"/>
+                <a16:creationId xmlns:a16="http://schemas.microsoft.com/office/drawing/2014/main" id="{17F3CC92-3744-94FE-D596-9417479F1508}"/>
               </a:ext>
             </a:extLst>
           </p:cNvPr>
@@ -899,7 +899,7 @@
           <p:cNvPr id="6" name="슬라이드 번호 개체 틀 5">
             <a:extLst>
               <a:ext uri="{FF2B5EF4-FFF2-40B4-BE49-F238E27FC236}">
-                <a16:creationId xmlns:a16="http://schemas.microsoft.com/office/drawing/2014/main" id="{ECF03A68-76D9-CC3F-6A1F-D6A068E5BF41}"/>
+                <a16:creationId xmlns:a16="http://schemas.microsoft.com/office/drawing/2014/main" id="{37C75FB9-5E99-D4D3-C25A-68544ECE4921}"/>
               </a:ext>
             </a:extLst>
           </p:cNvPr>
@@ -915,7 +915,7 @@
           <a:bodyPr/>
           <a:lstStyle/>
           <a:p>
-            <a:fld id="{DD851787-D415-4597-836C-BBB5D52CCA72}" type="slidenum">
+            <a:fld id="{AD30F524-F221-4BF1-8367-8122B5DD0B3F}" type="slidenum">
               <a:rPr lang="ko-KR" altLang="en-US" smtClean="0"/>
               <a:t>‹#›</a:t>
             </a:fld>
@@ -926,7 +926,7 @@
     </p:spTree>
     <p:extLst>
       <p:ext uri="{BB962C8B-B14F-4D97-AF65-F5344CB8AC3E}">
-        <p14:creationId xmlns:p14="http://schemas.microsoft.com/office/powerpoint/2010/main" val="1500055811"/>
+        <p14:creationId xmlns:p14="http://schemas.microsoft.com/office/powerpoint/2010/main" val="4232782586"/>
       </p:ext>
     </p:extLst>
   </p:cSld>
@@ -958,7 +958,7 @@
           <p:cNvPr id="2" name="제목 1">
             <a:extLst>
               <a:ext uri="{FF2B5EF4-FFF2-40B4-BE49-F238E27FC236}">
-                <a16:creationId xmlns:a16="http://schemas.microsoft.com/office/drawing/2014/main" id="{583E41E2-950B-B933-9A15-E60B2D57E9A8}"/>
+                <a16:creationId xmlns:a16="http://schemas.microsoft.com/office/drawing/2014/main" id="{5DE37C9D-9A29-0E27-6576-1DC78D46A49C}"/>
               </a:ext>
             </a:extLst>
           </p:cNvPr>
@@ -995,7 +995,7 @@
           <p:cNvPr id="3" name="텍스트 개체 틀 2">
             <a:extLst>
               <a:ext uri="{FF2B5EF4-FFF2-40B4-BE49-F238E27FC236}">
-                <a16:creationId xmlns:a16="http://schemas.microsoft.com/office/drawing/2014/main" id="{D05A6EDB-D33C-E08B-9D84-946296702F36}"/>
+                <a16:creationId xmlns:a16="http://schemas.microsoft.com/office/drawing/2014/main" id="{2719672D-F4D3-93B7-E46A-0ECBA2771DCA}"/>
               </a:ext>
             </a:extLst>
           </p:cNvPr>
@@ -1120,7 +1120,7 @@
           <p:cNvPr id="4" name="날짜 개체 틀 3">
             <a:extLst>
               <a:ext uri="{FF2B5EF4-FFF2-40B4-BE49-F238E27FC236}">
-                <a16:creationId xmlns:a16="http://schemas.microsoft.com/office/drawing/2014/main" id="{447EC735-3A5C-863A-9138-65231DFC0062}"/>
+                <a16:creationId xmlns:a16="http://schemas.microsoft.com/office/drawing/2014/main" id="{303490D4-21EF-D534-E220-1FE5F65CC45B}"/>
               </a:ext>
             </a:extLst>
           </p:cNvPr>
@@ -1136,9 +1136,9 @@
           <a:bodyPr/>
           <a:lstStyle/>
           <a:p>
-            <a:fld id="{3773AF33-02E8-4DCD-977D-6D89AD3CC8C6}" type="datetimeFigureOut">
+            <a:fld id="{3F69C512-D67E-4864-9B91-3D1BA57AAD11}" type="datetimeFigureOut">
               <a:rPr lang="ko-KR" altLang="en-US" smtClean="0"/>
-              <a:t>2026-05-18</a:t>
+              <a:t>2026-07-29</a:t>
             </a:fld>
             <a:endParaRPr lang="ko-KR" altLang="en-US"/>
           </a:p>
@@ -1149,7 +1149,7 @@
           <p:cNvPr id="5" name="바닥글 개체 틀 4">
             <a:extLst>
               <a:ext uri="{FF2B5EF4-FFF2-40B4-BE49-F238E27FC236}">
-                <a16:creationId xmlns:a16="http://schemas.microsoft.com/office/drawing/2014/main" id="{61116851-C5BD-651F-FFD7-390E80739E9D}"/>
+                <a16:creationId xmlns:a16="http://schemas.microsoft.com/office/drawing/2014/main" id="{E32BA591-E399-20F4-582E-50C48D9FB6D3}"/>
               </a:ext>
             </a:extLst>
           </p:cNvPr>
@@ -1174,7 +1174,7 @@
           <p:cNvPr id="6" name="슬라이드 번호 개체 틀 5">
             <a:extLst>
               <a:ext uri="{FF2B5EF4-FFF2-40B4-BE49-F238E27FC236}">
-                <a16:creationId xmlns:a16="http://schemas.microsoft.com/office/drawing/2014/main" id="{B12A4CE4-EA46-4C6D-9C8B-2E98C40387CB}"/>
+                <a16:creationId xmlns:a16="http://schemas.microsoft.com/office/drawing/2014/main" id="{5044089A-5620-7F18-EE0D-F75958C901AC}"/>
               </a:ext>
             </a:extLst>
           </p:cNvPr>
@@ -1190,7 +1190,7 @@
           <a:bodyPr/>
           <a:lstStyle/>
           <a:p>
-            <a:fld id="{DD851787-D415-4597-836C-BBB5D52CCA72}" type="slidenum">
+            <a:fld id="{AD30F524-F221-4BF1-8367-8122B5DD0B3F}" type="slidenum">
               <a:rPr lang="ko-KR" altLang="en-US" smtClean="0"/>
               <a:t>‹#›</a:t>
             </a:fld>
@@ -1201,7 +1201,7 @@
     </p:spTree>
     <p:extLst>
       <p:ext uri="{BB962C8B-B14F-4D97-AF65-F5344CB8AC3E}">
-        <p14:creationId xmlns:p14="http://schemas.microsoft.com/office/powerpoint/2010/main" val="2499417342"/>
+        <p14:creationId xmlns:p14="http://schemas.microsoft.com/office/powerpoint/2010/main" val="3039587612"/>
       </p:ext>
     </p:extLst>
   </p:cSld>
@@ -1233,7 +1233,7 @@
           <p:cNvPr id="2" name="제목 1">
             <a:extLst>
               <a:ext uri="{FF2B5EF4-FFF2-40B4-BE49-F238E27FC236}">
-                <a16:creationId xmlns:a16="http://schemas.microsoft.com/office/drawing/2014/main" id="{AC1238D1-E600-07D4-2988-FC8F809A5170}"/>
+                <a16:creationId xmlns:a16="http://schemas.microsoft.com/office/drawing/2014/main" id="{E90D4011-C475-8817-A796-8FA18F0E6301}"/>
               </a:ext>
             </a:extLst>
           </p:cNvPr>
@@ -1261,7 +1261,7 @@
           <p:cNvPr id="3" name="내용 개체 틀 2">
             <a:extLst>
               <a:ext uri="{FF2B5EF4-FFF2-40B4-BE49-F238E27FC236}">
-                <a16:creationId xmlns:a16="http://schemas.microsoft.com/office/drawing/2014/main" id="{980EC539-99E3-4A28-BC8B-8D31C783CAB8}"/>
+                <a16:creationId xmlns:a16="http://schemas.microsoft.com/office/drawing/2014/main" id="{7C64F904-6E77-1C20-ECFD-9D5250F7EBE0}"/>
               </a:ext>
             </a:extLst>
           </p:cNvPr>
@@ -1323,7 +1323,7 @@
           <p:cNvPr id="4" name="내용 개체 틀 3">
             <a:extLst>
               <a:ext uri="{FF2B5EF4-FFF2-40B4-BE49-F238E27FC236}">
-                <a16:creationId xmlns:a16="http://schemas.microsoft.com/office/drawing/2014/main" id="{F8F49BE2-8A86-8956-87A9-551CC6794EAF}"/>
+                <a16:creationId xmlns:a16="http://schemas.microsoft.com/office/drawing/2014/main" id="{860A4F6B-BFE1-ADC1-BB34-7F6F9832FA55}"/>
               </a:ext>
             </a:extLst>
           </p:cNvPr>
@@ -1385,7 +1385,7 @@
           <p:cNvPr id="5" name="날짜 개체 틀 4">
             <a:extLst>
               <a:ext uri="{FF2B5EF4-FFF2-40B4-BE49-F238E27FC236}">
-                <a16:creationId xmlns:a16="http://schemas.microsoft.com/office/drawing/2014/main" id="{C86F70F8-96DF-8A21-A902-57A15CC21D55}"/>
+                <a16:creationId xmlns:a16="http://schemas.microsoft.com/office/drawing/2014/main" id="{9FF2CF86-E310-C256-63BD-1A904CF20BAB}"/>
               </a:ext>
             </a:extLst>
           </p:cNvPr>
@@ -1401,9 +1401,9 @@
           <a:bodyPr/>
           <a:lstStyle/>
           <a:p>
-            <a:fld id="{3773AF33-02E8-4DCD-977D-6D89AD3CC8C6}" type="datetimeFigureOut">
+            <a:fld id="{3F69C512-D67E-4864-9B91-3D1BA57AAD11}" type="datetimeFigureOut">
               <a:rPr lang="ko-KR" altLang="en-US" smtClean="0"/>
-              <a:t>2026-05-18</a:t>
+              <a:t>2026-07-29</a:t>
             </a:fld>
             <a:endParaRPr lang="ko-KR" altLang="en-US"/>
           </a:p>
@@ -1414,7 +1414,7 @@
           <p:cNvPr id="6" name="바닥글 개체 틀 5">
             <a:extLst>
               <a:ext uri="{FF2B5EF4-FFF2-40B4-BE49-F238E27FC236}">
-                <a16:creationId xmlns:a16="http://schemas.microsoft.com/office/drawing/2014/main" id="{31E0190D-4534-20D4-E0CA-1AE90425C059}"/>
+                <a16:creationId xmlns:a16="http://schemas.microsoft.com/office/drawing/2014/main" id="{33986A99-A59D-8067-4BB1-2536E7625E56}"/>
               </a:ext>
             </a:extLst>
           </p:cNvPr>
@@ -1439,7 +1439,7 @@
           <p:cNvPr id="7" name="슬라이드 번호 개체 틀 6">
             <a:extLst>
               <a:ext uri="{FF2B5EF4-FFF2-40B4-BE49-F238E27FC236}">
-                <a16:creationId xmlns:a16="http://schemas.microsoft.com/office/drawing/2014/main" id="{632DC23C-272F-3834-C6A7-3688036ABCD5}"/>
+                <a16:creationId xmlns:a16="http://schemas.microsoft.com/office/drawing/2014/main" id="{E7AA8DCF-5994-36FF-E315-294B84757AB0}"/>
               </a:ext>
             </a:extLst>
           </p:cNvPr>
@@ -1455,7 +1455,7 @@
           <a:bodyPr/>
           <a:lstStyle/>
           <a:p>
-            <a:fld id="{DD851787-D415-4597-836C-BBB5D52CCA72}" type="slidenum">
+            <a:fld id="{AD30F524-F221-4BF1-8367-8122B5DD0B3F}" type="slidenum">
               <a:rPr lang="ko-KR" altLang="en-US" smtClean="0"/>
               <a:t>‹#›</a:t>
             </a:fld>
@@ -1466,7 +1466,7 @@
     </p:spTree>
     <p:extLst>
       <p:ext uri="{BB962C8B-B14F-4D97-AF65-F5344CB8AC3E}">
-        <p14:creationId xmlns:p14="http://schemas.microsoft.com/office/powerpoint/2010/main" val="1155885398"/>
+        <p14:creationId xmlns:p14="http://schemas.microsoft.com/office/powerpoint/2010/main" val="4277327378"/>
       </p:ext>
     </p:extLst>
   </p:cSld>
@@ -1498,7 +1498,7 @@
           <p:cNvPr id="2" name="제목 1">
             <a:extLst>
               <a:ext uri="{FF2B5EF4-FFF2-40B4-BE49-F238E27FC236}">
-                <a16:creationId xmlns:a16="http://schemas.microsoft.com/office/drawing/2014/main" id="{99E1A950-80E9-FEED-371D-818B4E2A55CD}"/>
+                <a16:creationId xmlns:a16="http://schemas.microsoft.com/office/drawing/2014/main" id="{C725C5BF-1D03-7B70-96DC-EE320403C461}"/>
               </a:ext>
             </a:extLst>
           </p:cNvPr>
@@ -1531,7 +1531,7 @@
           <p:cNvPr id="3" name="텍스트 개체 틀 2">
             <a:extLst>
               <a:ext uri="{FF2B5EF4-FFF2-40B4-BE49-F238E27FC236}">
-                <a16:creationId xmlns:a16="http://schemas.microsoft.com/office/drawing/2014/main" id="{407112E2-B1BB-073D-0682-AA8B0DF1B592}"/>
+                <a16:creationId xmlns:a16="http://schemas.microsoft.com/office/drawing/2014/main" id="{38A3E777-B072-4CE5-F11D-6791D8B65CEF}"/>
               </a:ext>
             </a:extLst>
           </p:cNvPr>
@@ -1602,7 +1602,7 @@
           <p:cNvPr id="4" name="내용 개체 틀 3">
             <a:extLst>
               <a:ext uri="{FF2B5EF4-FFF2-40B4-BE49-F238E27FC236}">
-                <a16:creationId xmlns:a16="http://schemas.microsoft.com/office/drawing/2014/main" id="{10F74C03-FCE8-D1B7-84C2-D41353C90451}"/>
+                <a16:creationId xmlns:a16="http://schemas.microsoft.com/office/drawing/2014/main" id="{9DAC8BFE-D443-5CAB-04D9-C98364F9CB5A}"/>
               </a:ext>
             </a:extLst>
           </p:cNvPr>
@@ -1664,7 +1664,7 @@
           <p:cNvPr id="5" name="텍스트 개체 틀 4">
             <a:extLst>
               <a:ext uri="{FF2B5EF4-FFF2-40B4-BE49-F238E27FC236}">
-                <a16:creationId xmlns:a16="http://schemas.microsoft.com/office/drawing/2014/main" id="{62DABE58-8EA1-6259-7493-68431CDF24A2}"/>
+                <a16:creationId xmlns:a16="http://schemas.microsoft.com/office/drawing/2014/main" id="{2E3BCEDF-30BF-322D-1A79-4F3C2804BA9B}"/>
               </a:ext>
             </a:extLst>
           </p:cNvPr>
@@ -1735,7 +1735,7 @@
           <p:cNvPr id="6" name="내용 개체 틀 5">
             <a:extLst>
               <a:ext uri="{FF2B5EF4-FFF2-40B4-BE49-F238E27FC236}">
-                <a16:creationId xmlns:a16="http://schemas.microsoft.com/office/drawing/2014/main" id="{E0F75B54-50C6-2516-4928-BAE9445FE382}"/>
+                <a16:creationId xmlns:a16="http://schemas.microsoft.com/office/drawing/2014/main" id="{800FABAE-E636-5473-4EAF-B01BC4D96D3C}"/>
               </a:ext>
             </a:extLst>
           </p:cNvPr>
@@ -1797,7 +1797,7 @@
           <p:cNvPr id="7" name="날짜 개체 틀 6">
             <a:extLst>
               <a:ext uri="{FF2B5EF4-FFF2-40B4-BE49-F238E27FC236}">
-                <a16:creationId xmlns:a16="http://schemas.microsoft.com/office/drawing/2014/main" id="{2BA8FE77-8DAA-5221-A94F-20C7C9276D55}"/>
+                <a16:creationId xmlns:a16="http://schemas.microsoft.com/office/drawing/2014/main" id="{FD3ED1ED-7BD6-D5C3-4158-4D2A6592F9C9}"/>
               </a:ext>
             </a:extLst>
           </p:cNvPr>
@@ -1813,9 +1813,9 @@
           <a:bodyPr/>
           <a:lstStyle/>
           <a:p>
-            <a:fld id="{3773AF33-02E8-4DCD-977D-6D89AD3CC8C6}" type="datetimeFigureOut">
+            <a:fld id="{3F69C512-D67E-4864-9B91-3D1BA57AAD11}" type="datetimeFigureOut">
               <a:rPr lang="ko-KR" altLang="en-US" smtClean="0"/>
-              <a:t>2026-05-18</a:t>
+              <a:t>2026-07-29</a:t>
             </a:fld>
             <a:endParaRPr lang="ko-KR" altLang="en-US"/>
           </a:p>
@@ -1826,7 +1826,7 @@
           <p:cNvPr id="8" name="바닥글 개체 틀 7">
             <a:extLst>
               <a:ext uri="{FF2B5EF4-FFF2-40B4-BE49-F238E27FC236}">
-                <a16:creationId xmlns:a16="http://schemas.microsoft.com/office/drawing/2014/main" id="{EE79EF2C-4E9C-F096-25E4-C377C0561316}"/>
+                <a16:creationId xmlns:a16="http://schemas.microsoft.com/office/drawing/2014/main" id="{DB38F71C-D39E-A7ED-1AF2-A343216342A9}"/>
               </a:ext>
             </a:extLst>
           </p:cNvPr>
@@ -1851,7 +1851,7 @@
           <p:cNvPr id="9" name="슬라이드 번호 개체 틀 8">
             <a:extLst>
               <a:ext uri="{FF2B5EF4-FFF2-40B4-BE49-F238E27FC236}">
-                <a16:creationId xmlns:a16="http://schemas.microsoft.com/office/drawing/2014/main" id="{94FD2476-6E6B-D8EB-0C03-71F23E400141}"/>
+                <a16:creationId xmlns:a16="http://schemas.microsoft.com/office/drawing/2014/main" id="{7703F5B3-3B3F-C3D6-58AA-6C63EE52BB42}"/>
               </a:ext>
             </a:extLst>
           </p:cNvPr>
@@ -1867,7 +1867,7 @@
           <a:bodyPr/>
           <a:lstStyle/>
           <a:p>
-            <a:fld id="{DD851787-D415-4597-836C-BBB5D52CCA72}" type="slidenum">
+            <a:fld id="{AD30F524-F221-4BF1-8367-8122B5DD0B3F}" type="slidenum">
               <a:rPr lang="ko-KR" altLang="en-US" smtClean="0"/>
               <a:t>‹#›</a:t>
             </a:fld>
@@ -1878,7 +1878,7 @@
     </p:spTree>
     <p:extLst>
       <p:ext uri="{BB962C8B-B14F-4D97-AF65-F5344CB8AC3E}">
-        <p14:creationId xmlns:p14="http://schemas.microsoft.com/office/powerpoint/2010/main" val="4173621818"/>
+        <p14:creationId xmlns:p14="http://schemas.microsoft.com/office/powerpoint/2010/main" val="3833371319"/>
       </p:ext>
     </p:extLst>
   </p:cSld>
@@ -1910,7 +1910,7 @@
           <p:cNvPr id="2" name="제목 1">
             <a:extLst>
               <a:ext uri="{FF2B5EF4-FFF2-40B4-BE49-F238E27FC236}">
-                <a16:creationId xmlns:a16="http://schemas.microsoft.com/office/drawing/2014/main" id="{7F2E6EF7-2718-8F01-AC90-14DAFBD45F86}"/>
+                <a16:creationId xmlns:a16="http://schemas.microsoft.com/office/drawing/2014/main" id="{21707B6A-DAB2-66F7-CC47-DE10700FF477}"/>
               </a:ext>
             </a:extLst>
           </p:cNvPr>
@@ -1938,7 +1938,7 @@
           <p:cNvPr id="3" name="날짜 개체 틀 2">
             <a:extLst>
               <a:ext uri="{FF2B5EF4-FFF2-40B4-BE49-F238E27FC236}">
-                <a16:creationId xmlns:a16="http://schemas.microsoft.com/office/drawing/2014/main" id="{32F5B7B5-5157-C07C-E2DA-0BC714ADCB30}"/>
+                <a16:creationId xmlns:a16="http://schemas.microsoft.com/office/drawing/2014/main" id="{66B8C9A4-8980-71EB-21BD-9AEDF8E5ABAE}"/>
               </a:ext>
             </a:extLst>
           </p:cNvPr>
@@ -1954,9 +1954,9 @@
           <a:bodyPr/>
           <a:lstStyle/>
           <a:p>
-            <a:fld id="{3773AF33-02E8-4DCD-977D-6D89AD3CC8C6}" type="datetimeFigureOut">
+            <a:fld id="{3F69C512-D67E-4864-9B91-3D1BA57AAD11}" type="datetimeFigureOut">
               <a:rPr lang="ko-KR" altLang="en-US" smtClean="0"/>
-              <a:t>2026-05-18</a:t>
+              <a:t>2026-07-29</a:t>
             </a:fld>
             <a:endParaRPr lang="ko-KR" altLang="en-US"/>
           </a:p>
@@ -1967,7 +1967,7 @@
           <p:cNvPr id="4" name="바닥글 개체 틀 3">
             <a:extLst>
               <a:ext uri="{FF2B5EF4-FFF2-40B4-BE49-F238E27FC236}">
-                <a16:creationId xmlns:a16="http://schemas.microsoft.com/office/drawing/2014/main" id="{8C91C812-58CB-7BF4-1158-8E63DAF06018}"/>
+                <a16:creationId xmlns:a16="http://schemas.microsoft.com/office/drawing/2014/main" id="{EDC0AC71-048D-F884-021C-894C2AC414EE}"/>
               </a:ext>
             </a:extLst>
           </p:cNvPr>
@@ -1992,7 +1992,7 @@
           <p:cNvPr id="5" name="슬라이드 번호 개체 틀 4">
             <a:extLst>
               <a:ext uri="{FF2B5EF4-FFF2-40B4-BE49-F238E27FC236}">
-                <a16:creationId xmlns:a16="http://schemas.microsoft.com/office/drawing/2014/main" id="{7F57221B-3803-2678-13B2-A878E87BC3A2}"/>
+                <a16:creationId xmlns:a16="http://schemas.microsoft.com/office/drawing/2014/main" id="{CC3F0176-6D11-9426-203B-E3FA2FBB6A7A}"/>
               </a:ext>
             </a:extLst>
           </p:cNvPr>
@@ -2008,7 +2008,7 @@
           <a:bodyPr/>
           <a:lstStyle/>
           <a:p>
-            <a:fld id="{DD851787-D415-4597-836C-BBB5D52CCA72}" type="slidenum">
+            <a:fld id="{AD30F524-F221-4BF1-8367-8122B5DD0B3F}" type="slidenum">
               <a:rPr lang="ko-KR" altLang="en-US" smtClean="0"/>
               <a:t>‹#›</a:t>
             </a:fld>
@@ -2019,7 +2019,7 @@
     </p:spTree>
     <p:extLst>
       <p:ext uri="{BB962C8B-B14F-4D97-AF65-F5344CB8AC3E}">
-        <p14:creationId xmlns:p14="http://schemas.microsoft.com/office/powerpoint/2010/main" val="3866604134"/>
+        <p14:creationId xmlns:p14="http://schemas.microsoft.com/office/powerpoint/2010/main" val="466057330"/>
       </p:ext>
     </p:extLst>
   </p:cSld>
@@ -2051,7 +2051,7 @@
           <p:cNvPr id="2" name="날짜 개체 틀 1">
             <a:extLst>
               <a:ext uri="{FF2B5EF4-FFF2-40B4-BE49-F238E27FC236}">
-                <a16:creationId xmlns:a16="http://schemas.microsoft.com/office/drawing/2014/main" id="{39111614-EA17-154A-C8CA-6B37B2F9D64E}"/>
+                <a16:creationId xmlns:a16="http://schemas.microsoft.com/office/drawing/2014/main" id="{9B0964D8-3C82-4FA8-CA69-A45E17F1FF19}"/>
               </a:ext>
             </a:extLst>
           </p:cNvPr>
@@ -2067,9 +2067,9 @@
           <a:bodyPr/>
           <a:lstStyle/>
           <a:p>
-            <a:fld id="{3773AF33-02E8-4DCD-977D-6D89AD3CC8C6}" type="datetimeFigureOut">
+            <a:fld id="{3F69C512-D67E-4864-9B91-3D1BA57AAD11}" type="datetimeFigureOut">
               <a:rPr lang="ko-KR" altLang="en-US" smtClean="0"/>
-              <a:t>2026-05-18</a:t>
+              <a:t>2026-07-29</a:t>
             </a:fld>
             <a:endParaRPr lang="ko-KR" altLang="en-US"/>
           </a:p>
@@ -2080,7 +2080,7 @@
           <p:cNvPr id="3" name="바닥글 개체 틀 2">
             <a:extLst>
               <a:ext uri="{FF2B5EF4-FFF2-40B4-BE49-F238E27FC236}">
-                <a16:creationId xmlns:a16="http://schemas.microsoft.com/office/drawing/2014/main" id="{B4631BAC-28D5-9472-F487-19E45CFE34A3}"/>
+                <a16:creationId xmlns:a16="http://schemas.microsoft.com/office/drawing/2014/main" id="{97A18C34-19A6-17D2-CA7B-0C3ADDB6AAD6}"/>
               </a:ext>
             </a:extLst>
           </p:cNvPr>
@@ -2105,7 +2105,7 @@
           <p:cNvPr id="4" name="슬라이드 번호 개체 틀 3">
             <a:extLst>
               <a:ext uri="{FF2B5EF4-FFF2-40B4-BE49-F238E27FC236}">
-                <a16:creationId xmlns:a16="http://schemas.microsoft.com/office/drawing/2014/main" id="{BA9D02B6-B275-19E9-B059-ED80639B98B2}"/>
+                <a16:creationId xmlns:a16="http://schemas.microsoft.com/office/drawing/2014/main" id="{228540B4-6A12-C9A3-08BC-DD256D151896}"/>
               </a:ext>
             </a:extLst>
           </p:cNvPr>
@@ -2121,7 +2121,7 @@
           <a:bodyPr/>
           <a:lstStyle/>
           <a:p>
-            <a:fld id="{DD851787-D415-4597-836C-BBB5D52CCA72}" type="slidenum">
+            <a:fld id="{AD30F524-F221-4BF1-8367-8122B5DD0B3F}" type="slidenum">
               <a:rPr lang="ko-KR" altLang="en-US" smtClean="0"/>
               <a:t>‹#›</a:t>
             </a:fld>
@@ -2132,7 +2132,7 @@
     </p:spTree>
     <p:extLst>
       <p:ext uri="{BB962C8B-B14F-4D97-AF65-F5344CB8AC3E}">
-        <p14:creationId xmlns:p14="http://schemas.microsoft.com/office/powerpoint/2010/main" val="2293409486"/>
+        <p14:creationId xmlns:p14="http://schemas.microsoft.com/office/powerpoint/2010/main" val="931722881"/>
       </p:ext>
     </p:extLst>
   </p:cSld>
@@ -2164,7 +2164,7 @@
           <p:cNvPr id="2" name="제목 1">
             <a:extLst>
               <a:ext uri="{FF2B5EF4-FFF2-40B4-BE49-F238E27FC236}">
-                <a16:creationId xmlns:a16="http://schemas.microsoft.com/office/drawing/2014/main" id="{20376663-245E-5284-088D-222F1133873C}"/>
+                <a16:creationId xmlns:a16="http://schemas.microsoft.com/office/drawing/2014/main" id="{B578CA05-E40B-5080-769A-B819281F8BA5}"/>
               </a:ext>
             </a:extLst>
           </p:cNvPr>
@@ -2201,7 +2201,7 @@
           <p:cNvPr id="3" name="내용 개체 틀 2">
             <a:extLst>
               <a:ext uri="{FF2B5EF4-FFF2-40B4-BE49-F238E27FC236}">
-                <a16:creationId xmlns:a16="http://schemas.microsoft.com/office/drawing/2014/main" id="{97DA753A-3BC6-A3F2-8C3E-0166A3640000}"/>
+                <a16:creationId xmlns:a16="http://schemas.microsoft.com/office/drawing/2014/main" id="{BD142681-E6CD-5632-1A8F-DE8BEA64D766}"/>
               </a:ext>
             </a:extLst>
           </p:cNvPr>
@@ -2291,7 +2291,7 @@
           <p:cNvPr id="4" name="텍스트 개체 틀 3">
             <a:extLst>
               <a:ext uri="{FF2B5EF4-FFF2-40B4-BE49-F238E27FC236}">
-                <a16:creationId xmlns:a16="http://schemas.microsoft.com/office/drawing/2014/main" id="{A4235F58-8C51-7E9A-380E-96F5ACADFC00}"/>
+                <a16:creationId xmlns:a16="http://schemas.microsoft.com/office/drawing/2014/main" id="{8EEBC98E-C458-73F2-4996-8601265F3B87}"/>
               </a:ext>
             </a:extLst>
           </p:cNvPr>
@@ -2362,7 +2362,7 @@
           <p:cNvPr id="5" name="날짜 개체 틀 4">
             <a:extLst>
               <a:ext uri="{FF2B5EF4-FFF2-40B4-BE49-F238E27FC236}">
-                <a16:creationId xmlns:a16="http://schemas.microsoft.com/office/drawing/2014/main" id="{3F81A894-67DE-9A75-7C4C-520F027E3DD7}"/>
+                <a16:creationId xmlns:a16="http://schemas.microsoft.com/office/drawing/2014/main" id="{C7331C31-EB5B-3027-9602-BAD8EAB9046B}"/>
               </a:ext>
             </a:extLst>
           </p:cNvPr>
@@ -2378,9 +2378,9 @@
           <a:bodyPr/>
           <a:lstStyle/>
           <a:p>
-            <a:fld id="{3773AF33-02E8-4DCD-977D-6D89AD3CC8C6}" type="datetimeFigureOut">
+            <a:fld id="{3F69C512-D67E-4864-9B91-3D1BA57AAD11}" type="datetimeFigureOut">
               <a:rPr lang="ko-KR" altLang="en-US" smtClean="0"/>
-              <a:t>2026-05-18</a:t>
+              <a:t>2026-07-29</a:t>
             </a:fld>
             <a:endParaRPr lang="ko-KR" altLang="en-US"/>
           </a:p>
@@ -2391,7 +2391,7 @@
           <p:cNvPr id="6" name="바닥글 개체 틀 5">
             <a:extLst>
               <a:ext uri="{FF2B5EF4-FFF2-40B4-BE49-F238E27FC236}">
-                <a16:creationId xmlns:a16="http://schemas.microsoft.com/office/drawing/2014/main" id="{DFA11D4A-3ADD-4196-BBA4-7D869CF7D828}"/>
+                <a16:creationId xmlns:a16="http://schemas.microsoft.com/office/drawing/2014/main" id="{31F4A365-A1BC-9E4A-73A9-9D6150C5EDCA}"/>
               </a:ext>
             </a:extLst>
           </p:cNvPr>
@@ -2416,7 +2416,7 @@
           <p:cNvPr id="7" name="슬라이드 번호 개체 틀 6">
             <a:extLst>
               <a:ext uri="{FF2B5EF4-FFF2-40B4-BE49-F238E27FC236}">
-                <a16:creationId xmlns:a16="http://schemas.microsoft.com/office/drawing/2014/main" id="{A4A585CC-2FAC-F2C1-DE9E-57E104EDDAEA}"/>
+                <a16:creationId xmlns:a16="http://schemas.microsoft.com/office/drawing/2014/main" id="{55D490A3-2656-5C38-C864-2FCF46135240}"/>
               </a:ext>
             </a:extLst>
           </p:cNvPr>
@@ -2432,7 +2432,7 @@
           <a:bodyPr/>
           <a:lstStyle/>
           <a:p>
-            <a:fld id="{DD851787-D415-4597-836C-BBB5D52CCA72}" type="slidenum">
+            <a:fld id="{AD30F524-F221-4BF1-8367-8122B5DD0B3F}" type="slidenum">
               <a:rPr lang="ko-KR" altLang="en-US" smtClean="0"/>
               <a:t>‹#›</a:t>
             </a:fld>
@@ -2443,7 +2443,7 @@
     </p:spTree>
     <p:extLst>
       <p:ext uri="{BB962C8B-B14F-4D97-AF65-F5344CB8AC3E}">
-        <p14:creationId xmlns:p14="http://schemas.microsoft.com/office/powerpoint/2010/main" val="2168535899"/>
+        <p14:creationId xmlns:p14="http://schemas.microsoft.com/office/powerpoint/2010/main" val="1617455861"/>
       </p:ext>
     </p:extLst>
   </p:cSld>
@@ -2475,7 +2475,7 @@
           <p:cNvPr id="2" name="제목 1">
             <a:extLst>
               <a:ext uri="{FF2B5EF4-FFF2-40B4-BE49-F238E27FC236}">
-                <a16:creationId xmlns:a16="http://schemas.microsoft.com/office/drawing/2014/main" id="{32B8C016-A8B8-3479-5232-BB369B43314C}"/>
+                <a16:creationId xmlns:a16="http://schemas.microsoft.com/office/drawing/2014/main" id="{3A416237-1540-F584-53F7-344E0B1ECA21}"/>
               </a:ext>
             </a:extLst>
           </p:cNvPr>
@@ -2512,7 +2512,7 @@
           <p:cNvPr id="3" name="그림 개체 틀 2">
             <a:extLst>
               <a:ext uri="{FF2B5EF4-FFF2-40B4-BE49-F238E27FC236}">
-                <a16:creationId xmlns:a16="http://schemas.microsoft.com/office/drawing/2014/main" id="{5923365A-E12D-5947-E42A-C60EED5B50B2}"/>
+                <a16:creationId xmlns:a16="http://schemas.microsoft.com/office/drawing/2014/main" id="{22514251-5150-F168-6F3B-E33E92CECC34}"/>
               </a:ext>
             </a:extLst>
           </p:cNvPr>
@@ -2579,7 +2579,7 @@
           <p:cNvPr id="4" name="텍스트 개체 틀 3">
             <a:extLst>
               <a:ext uri="{FF2B5EF4-FFF2-40B4-BE49-F238E27FC236}">
-                <a16:creationId xmlns:a16="http://schemas.microsoft.com/office/drawing/2014/main" id="{79B0B3EA-6114-EC46-4C8D-407FD869E43C}"/>
+                <a16:creationId xmlns:a16="http://schemas.microsoft.com/office/drawing/2014/main" id="{A1EBAA4D-BC9F-0D49-8E2A-8AEF6FD02C0E}"/>
               </a:ext>
             </a:extLst>
           </p:cNvPr>
@@ -2650,7 +2650,7 @@
           <p:cNvPr id="5" name="날짜 개체 틀 4">
             <a:extLst>
               <a:ext uri="{FF2B5EF4-FFF2-40B4-BE49-F238E27FC236}">
-                <a16:creationId xmlns:a16="http://schemas.microsoft.com/office/drawing/2014/main" id="{06EDA117-A7EF-F0F2-D886-9B8D7C5A5F6B}"/>
+                <a16:creationId xmlns:a16="http://schemas.microsoft.com/office/drawing/2014/main" id="{1F69B7BD-7289-021D-211B-4AD36C38B44E}"/>
               </a:ext>
             </a:extLst>
           </p:cNvPr>
@@ -2666,9 +2666,9 @@
           <a:bodyPr/>
           <a:lstStyle/>
           <a:p>
-            <a:fld id="{3773AF33-02E8-4DCD-977D-6D89AD3CC8C6}" type="datetimeFigureOut">
+            <a:fld id="{3F69C512-D67E-4864-9B91-3D1BA57AAD11}" type="datetimeFigureOut">
               <a:rPr lang="ko-KR" altLang="en-US" smtClean="0"/>
-              <a:t>2026-05-18</a:t>
+              <a:t>2026-07-29</a:t>
             </a:fld>
             <a:endParaRPr lang="ko-KR" altLang="en-US"/>
           </a:p>
@@ -2679,7 +2679,7 @@
           <p:cNvPr id="6" name="바닥글 개체 틀 5">
             <a:extLst>
               <a:ext uri="{FF2B5EF4-FFF2-40B4-BE49-F238E27FC236}">
-                <a16:creationId xmlns:a16="http://schemas.microsoft.com/office/drawing/2014/main" id="{E841B1EA-E3BB-721F-757C-8872ABF1B37F}"/>
+                <a16:creationId xmlns:a16="http://schemas.microsoft.com/office/drawing/2014/main" id="{625A4896-2213-939A-2CFB-194E72FF0EA6}"/>
               </a:ext>
             </a:extLst>
           </p:cNvPr>
@@ -2704,7 +2704,7 @@
           <p:cNvPr id="7" name="슬라이드 번호 개체 틀 6">
             <a:extLst>
               <a:ext uri="{FF2B5EF4-FFF2-40B4-BE49-F238E27FC236}">
-                <a16:creationId xmlns:a16="http://schemas.microsoft.com/office/drawing/2014/main" id="{DEFDAB31-B2B3-0C93-94C1-DE0F449EAA33}"/>
+                <a16:creationId xmlns:a16="http://schemas.microsoft.com/office/drawing/2014/main" id="{D7471983-4D86-19C7-6900-F8DC79623E60}"/>
               </a:ext>
             </a:extLst>
           </p:cNvPr>
@@ -2720,7 +2720,7 @@
           <a:bodyPr/>
           <a:lstStyle/>
           <a:p>
-            <a:fld id="{DD851787-D415-4597-836C-BBB5D52CCA72}" type="slidenum">
+            <a:fld id="{AD30F524-F221-4BF1-8367-8122B5DD0B3F}" type="slidenum">
               <a:rPr lang="ko-KR" altLang="en-US" smtClean="0"/>
               <a:t>‹#›</a:t>
             </a:fld>
@@ -2731,7 +2731,7 @@
     </p:spTree>
     <p:extLst>
       <p:ext uri="{BB962C8B-B14F-4D97-AF65-F5344CB8AC3E}">
-        <p14:creationId xmlns:p14="http://schemas.microsoft.com/office/powerpoint/2010/main" val="550382845"/>
+        <p14:creationId xmlns:p14="http://schemas.microsoft.com/office/powerpoint/2010/main" val="58260799"/>
       </p:ext>
     </p:extLst>
   </p:cSld>
@@ -2768,7 +2768,7 @@
           <p:cNvPr id="2" name="제목 개체 틀 1">
             <a:extLst>
               <a:ext uri="{FF2B5EF4-FFF2-40B4-BE49-F238E27FC236}">
-                <a16:creationId xmlns:a16="http://schemas.microsoft.com/office/drawing/2014/main" id="{A7613842-D9D0-9DC8-8FE6-CE3230157748}"/>
+                <a16:creationId xmlns:a16="http://schemas.microsoft.com/office/drawing/2014/main" id="{28004A47-E021-432A-846E-B6D63F3C331B}"/>
               </a:ext>
             </a:extLst>
           </p:cNvPr>
@@ -2806,7 +2806,7 @@
           <p:cNvPr id="3" name="텍스트 개체 틀 2">
             <a:extLst>
               <a:ext uri="{FF2B5EF4-FFF2-40B4-BE49-F238E27FC236}">
-                <a16:creationId xmlns:a16="http://schemas.microsoft.com/office/drawing/2014/main" id="{120B4298-7CE6-6978-CF1A-9162E6975015}"/>
+                <a16:creationId xmlns:a16="http://schemas.microsoft.com/office/drawing/2014/main" id="{DFD16FB6-4DA5-CC58-0AF5-831C4F9F832F}"/>
               </a:ext>
             </a:extLst>
           </p:cNvPr>
@@ -2873,7 +2873,7 @@
           <p:cNvPr id="4" name="날짜 개체 틀 3">
             <a:extLst>
               <a:ext uri="{FF2B5EF4-FFF2-40B4-BE49-F238E27FC236}">
-                <a16:creationId xmlns:a16="http://schemas.microsoft.com/office/drawing/2014/main" id="{5ED4E394-B41F-290A-6BF0-243D3DFDD030}"/>
+                <a16:creationId xmlns:a16="http://schemas.microsoft.com/office/drawing/2014/main" id="{7044573C-B8D4-A34F-42A9-8E6B0F16E73E}"/>
               </a:ext>
             </a:extLst>
           </p:cNvPr>
@@ -2907,9 +2907,9 @@
             </a:lvl1pPr>
           </a:lstStyle>
           <a:p>
-            <a:fld id="{3773AF33-02E8-4DCD-977D-6D89AD3CC8C6}" type="datetimeFigureOut">
+            <a:fld id="{3F69C512-D67E-4864-9B91-3D1BA57AAD11}" type="datetimeFigureOut">
               <a:rPr lang="ko-KR" altLang="en-US" smtClean="0"/>
-              <a:t>2026-05-18</a:t>
+              <a:t>2026-07-29</a:t>
             </a:fld>
             <a:endParaRPr lang="ko-KR" altLang="en-US"/>
           </a:p>
@@ -2920,7 +2920,7 @@
           <p:cNvPr id="5" name="바닥글 개체 틀 4">
             <a:extLst>
               <a:ext uri="{FF2B5EF4-FFF2-40B4-BE49-F238E27FC236}">
-                <a16:creationId xmlns:a16="http://schemas.microsoft.com/office/drawing/2014/main" id="{3CBEEB0D-780F-2E5E-16E0-96CC783F6ECD}"/>
+                <a16:creationId xmlns:a16="http://schemas.microsoft.com/office/drawing/2014/main" id="{84035C26-DF50-9647-6F6A-E2392C511CEF}"/>
               </a:ext>
             </a:extLst>
           </p:cNvPr>
@@ -2963,7 +2963,7 @@
           <p:cNvPr id="6" name="슬라이드 번호 개체 틀 5">
             <a:extLst>
               <a:ext uri="{FF2B5EF4-FFF2-40B4-BE49-F238E27FC236}">
-                <a16:creationId xmlns:a16="http://schemas.microsoft.com/office/drawing/2014/main" id="{83F2C5BD-F8C3-D54E-50D4-AB08B836E192}"/>
+                <a16:creationId xmlns:a16="http://schemas.microsoft.com/office/drawing/2014/main" id="{72D3537B-7404-AE76-8D59-E96BEA0070E1}"/>
               </a:ext>
             </a:extLst>
           </p:cNvPr>
@@ -2997,7 +2997,7 @@
             </a:lvl1pPr>
           </a:lstStyle>
           <a:p>
-            <a:fld id="{DD851787-D415-4597-836C-BBB5D52CCA72}" type="slidenum">
+            <a:fld id="{AD30F524-F221-4BF1-8367-8122B5DD0B3F}" type="slidenum">
               <a:rPr lang="ko-KR" altLang="en-US" smtClean="0"/>
               <a:t>‹#›</a:t>
             </a:fld>
@@ -3008,7 +3008,7 @@
     </p:spTree>
     <p:extLst>
       <p:ext uri="{BB962C8B-B14F-4D97-AF65-F5344CB8AC3E}">
-        <p14:creationId xmlns:p14="http://schemas.microsoft.com/office/powerpoint/2010/main" val="1563518719"/>
+        <p14:creationId xmlns:p14="http://schemas.microsoft.com/office/powerpoint/2010/main" val="196895919"/>
       </p:ext>
     </p:extLst>
   </p:cSld>
@@ -3331,7 +3331,7 @@
           <p:cNvPr id="2" name="직사각형 1">
             <a:extLst>
               <a:ext uri="{FF2B5EF4-FFF2-40B4-BE49-F238E27FC236}">
-                <a16:creationId xmlns:a16="http://schemas.microsoft.com/office/drawing/2014/main" id="{6B7A2D43-312B-D42A-A4C6-CB080DC6C9EE}"/>
+                <a16:creationId xmlns:a16="http://schemas.microsoft.com/office/drawing/2014/main" id="{F987D1F5-0C91-CF63-2F55-8976685F3F31}"/>
               </a:ext>
             </a:extLst>
           </p:cNvPr>
@@ -3399,7 +3399,7 @@
           <p:cNvPr id="3" name="Title">
             <a:extLst>
               <a:ext uri="{FF2B5EF4-FFF2-40B4-BE49-F238E27FC236}">
-                <a16:creationId xmlns:a16="http://schemas.microsoft.com/office/drawing/2014/main" id="{DC948461-1D34-F9A5-B3B7-09688D187C8B}"/>
+                <a16:creationId xmlns:a16="http://schemas.microsoft.com/office/drawing/2014/main" id="{56DA31B6-4855-8109-3766-BE2984E6B92E}"/>
               </a:ext>
             </a:extLst>
           </p:cNvPr>
@@ -3452,7 +3452,7 @@
           <p:cNvPr id="4" name="Subtitle">
             <a:extLst>
               <a:ext uri="{FF2B5EF4-FFF2-40B4-BE49-F238E27FC236}">
-                <a16:creationId xmlns:a16="http://schemas.microsoft.com/office/drawing/2014/main" id="{D6173536-BA96-2626-FE95-00762A3B1F81}"/>
+                <a16:creationId xmlns:a16="http://schemas.microsoft.com/office/drawing/2014/main" id="{5A237095-0265-F32A-F5AB-B58F2D1A4CFE}"/>
               </a:ext>
             </a:extLst>
           </p:cNvPr>
@@ -3495,7 +3495,7 @@
           <p:cNvPr id="5" name="직선 연결선 4">
             <a:extLst>
               <a:ext uri="{FF2B5EF4-FFF2-40B4-BE49-F238E27FC236}">
-                <a16:creationId xmlns:a16="http://schemas.microsoft.com/office/drawing/2014/main" id="{171F5979-DD8A-555E-8E0C-C119D1254F99}"/>
+                <a16:creationId xmlns:a16="http://schemas.microsoft.com/office/drawing/2014/main" id="{C70D7360-5711-7510-2540-2CE4062A52FB}"/>
               </a:ext>
             </a:extLst>
           </p:cNvPr>
@@ -3536,7 +3536,7 @@
           <p:cNvPr id="6" name="Main">
             <a:extLst>
               <a:ext uri="{FF2B5EF4-FFF2-40B4-BE49-F238E27FC236}">
-                <a16:creationId xmlns:a16="http://schemas.microsoft.com/office/drawing/2014/main" id="{91545C4C-105E-0186-92B5-01C8AE87B573}"/>
+                <a16:creationId xmlns:a16="http://schemas.microsoft.com/office/drawing/2014/main" id="{98E23F9C-9301-FF53-F7DC-DDBC2B238A59}"/>
               </a:ext>
             </a:extLst>
           </p:cNvPr>
@@ -3638,7 +3638,7 @@
           <p:cNvPr id="7" name="사각형: 둥근 모서리 6">
             <a:extLst>
               <a:ext uri="{FF2B5EF4-FFF2-40B4-BE49-F238E27FC236}">
-                <a16:creationId xmlns:a16="http://schemas.microsoft.com/office/drawing/2014/main" id="{C02D7B49-74ED-793D-457A-DB2D37EE39B5}"/>
+                <a16:creationId xmlns:a16="http://schemas.microsoft.com/office/drawing/2014/main" id="{DBBEEC86-72C8-EA33-1552-0B8B86CB54D1}"/>
               </a:ext>
             </a:extLst>
           </p:cNvPr>
@@ -3701,7 +3701,7 @@
           <p:cNvPr id="8" name="Metric">
             <a:extLst>
               <a:ext uri="{FF2B5EF4-FFF2-40B4-BE49-F238E27FC236}">
-                <a16:creationId xmlns:a16="http://schemas.microsoft.com/office/drawing/2014/main" id="{5E488D7D-2D5F-1ED7-C082-257A97C549E6}"/>
+                <a16:creationId xmlns:a16="http://schemas.microsoft.com/office/drawing/2014/main" id="{D4506D0D-7E4C-2A99-45FB-9245312BFD89}"/>
               </a:ext>
             </a:extLst>
           </p:cNvPr>
@@ -3854,7 +3854,7 @@
           <p:cNvPr id="9" name="사각형: 둥근 모서리 8">
             <a:extLst>
               <a:ext uri="{FF2B5EF4-FFF2-40B4-BE49-F238E27FC236}">
-                <a16:creationId xmlns:a16="http://schemas.microsoft.com/office/drawing/2014/main" id="{FABB05CE-4B60-EA2C-30E1-7FD1DE428FD7}"/>
+                <a16:creationId xmlns:a16="http://schemas.microsoft.com/office/drawing/2014/main" id="{2305C771-7392-1903-FE03-C809CC0B6C84}"/>
               </a:ext>
             </a:extLst>
           </p:cNvPr>
@@ -3917,7 +3917,7 @@
           <p:cNvPr id="10" name="Metric">
             <a:extLst>
               <a:ext uri="{FF2B5EF4-FFF2-40B4-BE49-F238E27FC236}">
-                <a16:creationId xmlns:a16="http://schemas.microsoft.com/office/drawing/2014/main" id="{808FA669-E06E-8EDE-357D-F62A0D225D89}"/>
+                <a16:creationId xmlns:a16="http://schemas.microsoft.com/office/drawing/2014/main" id="{30270515-B36C-CAEA-E778-C0F2938194C9}"/>
               </a:ext>
             </a:extLst>
           </p:cNvPr>
@@ -4053,7 +4053,7 @@
           <p:cNvPr id="11" name="사각형: 둥근 모서리 10">
             <a:extLst>
               <a:ext uri="{FF2B5EF4-FFF2-40B4-BE49-F238E27FC236}">
-                <a16:creationId xmlns:a16="http://schemas.microsoft.com/office/drawing/2014/main" id="{BC88F295-B81F-E428-B189-22C6CC1CC656}"/>
+                <a16:creationId xmlns:a16="http://schemas.microsoft.com/office/drawing/2014/main" id="{C1C9FDED-7F8B-3E0A-4CFD-B6C9992CF0D7}"/>
               </a:ext>
             </a:extLst>
           </p:cNvPr>
@@ -4116,7 +4116,7 @@
           <p:cNvPr id="12" name="Metric">
             <a:extLst>
               <a:ext uri="{FF2B5EF4-FFF2-40B4-BE49-F238E27FC236}">
-                <a16:creationId xmlns:a16="http://schemas.microsoft.com/office/drawing/2014/main" id="{CE8F8DBA-1B5D-081D-BD01-E048DD4D7394}"/>
+                <a16:creationId xmlns:a16="http://schemas.microsoft.com/office/drawing/2014/main" id="{CBB6105F-E695-1C6F-4233-BCF0D28C93B2}"/>
               </a:ext>
             </a:extLst>
           </p:cNvPr>
@@ -4202,7 +4202,7 @@
                 <a:latin typeface="Malgun Gothic" panose="020B0503020000020004" pitchFamily="50" charset="-127"/>
                 <a:ea typeface="Malgun Gothic" panose="020B0503020000020004" pitchFamily="50" charset="-127"/>
               </a:rPr>
-              <a:t>apply_notification_policy</a:t>
+              <a:t>propose_notification_policy</a:t>
             </a:r>
             <a:r>
               <a:rPr lang="ko-KR" altLang="en-US" sz="1100" b="1">
@@ -4222,7 +4222,7 @@
           <p:cNvPr id="13" name="사각형: 둥근 모서리 12">
             <a:extLst>
               <a:ext uri="{FF2B5EF4-FFF2-40B4-BE49-F238E27FC236}">
-                <a16:creationId xmlns:a16="http://schemas.microsoft.com/office/drawing/2014/main" id="{8F4A1E47-6271-88F8-06D0-88D1D6249C93}"/>
+                <a16:creationId xmlns:a16="http://schemas.microsoft.com/office/drawing/2014/main" id="{CAE42AAF-95FF-17D5-2835-61D1692EAD72}"/>
               </a:ext>
             </a:extLst>
           </p:cNvPr>
@@ -4285,7 +4285,7 @@
           <p:cNvPr id="14" name="Metric">
             <a:extLst>
               <a:ext uri="{FF2B5EF4-FFF2-40B4-BE49-F238E27FC236}">
-                <a16:creationId xmlns:a16="http://schemas.microsoft.com/office/drawing/2014/main" id="{1B04853C-6199-9A40-6C8F-496C8D1A0DC0}"/>
+                <a16:creationId xmlns:a16="http://schemas.microsoft.com/office/drawing/2014/main" id="{A1F80C14-1F94-E181-8158-69E3CD9A00A2}"/>
               </a:ext>
             </a:extLst>
           </p:cNvPr>
@@ -4371,7 +4371,7 @@
           <p:cNvPr id="15" name="Takeaway">
             <a:extLst>
               <a:ext uri="{FF2B5EF4-FFF2-40B4-BE49-F238E27FC236}">
-                <a16:creationId xmlns:a16="http://schemas.microsoft.com/office/drawing/2014/main" id="{BD4CC01E-46EC-773E-C54B-F5F0C2B1B925}"/>
+                <a16:creationId xmlns:a16="http://schemas.microsoft.com/office/drawing/2014/main" id="{7751DBA4-7E39-7D61-31FC-362747F8A85B}"/>
               </a:ext>
             </a:extLst>
           </p:cNvPr>
@@ -4531,7 +4531,7 @@
           <p:cNvPr id="16" name="Footer">
             <a:extLst>
               <a:ext uri="{FF2B5EF4-FFF2-40B4-BE49-F238E27FC236}">
-                <a16:creationId xmlns:a16="http://schemas.microsoft.com/office/drawing/2014/main" id="{409060BE-E522-2936-986A-E4F78B1CD271}"/>
+                <a16:creationId xmlns:a16="http://schemas.microsoft.com/office/drawing/2014/main" id="{A915ABD4-9CC5-2D11-B529-37EAEF5B6CC0}"/>
               </a:ext>
             </a:extLst>
           </p:cNvPr>
@@ -4604,7 +4604,7 @@
           <p:cNvPr id="17" name="Slide Number">
             <a:extLst>
               <a:ext uri="{FF2B5EF4-FFF2-40B4-BE49-F238E27FC236}">
-                <a16:creationId xmlns:a16="http://schemas.microsoft.com/office/drawing/2014/main" id="{BE4A6083-BBAA-C64D-7920-82F4FD90604E}"/>
+                <a16:creationId xmlns:a16="http://schemas.microsoft.com/office/drawing/2014/main" id="{5EED8AA0-276A-BD35-779C-E85BA1FB6092}"/>
               </a:ext>
             </a:extLst>
           </p:cNvPr>
@@ -4653,7 +4653,7 @@
     </p:spTree>
     <p:extLst>
       <p:ext uri="{BB962C8B-B14F-4D97-AF65-F5344CB8AC3E}">
-        <p14:creationId xmlns:p14="http://schemas.microsoft.com/office/powerpoint/2010/main" val="354190535"/>
+        <p14:creationId xmlns:p14="http://schemas.microsoft.com/office/powerpoint/2010/main" val="830484518"/>
       </p:ext>
     </p:extLst>
   </p:cSld>
@@ -4685,7 +4685,7 @@
           <p:cNvPr id="2" name="직사각형 1">
             <a:extLst>
               <a:ext uri="{FF2B5EF4-FFF2-40B4-BE49-F238E27FC236}">
-                <a16:creationId xmlns:a16="http://schemas.microsoft.com/office/drawing/2014/main" id="{590FA276-307F-B6FC-2848-1B4AAFC68B34}"/>
+                <a16:creationId xmlns:a16="http://schemas.microsoft.com/office/drawing/2014/main" id="{2EB99606-F506-2FE2-E943-DA35B965314D}"/>
               </a:ext>
             </a:extLst>
           </p:cNvPr>
@@ -4753,7 +4753,7 @@
           <p:cNvPr id="3" name="Title">
             <a:extLst>
               <a:ext uri="{FF2B5EF4-FFF2-40B4-BE49-F238E27FC236}">
-                <a16:creationId xmlns:a16="http://schemas.microsoft.com/office/drawing/2014/main" id="{3A3409BC-4883-6798-9871-4DAE2A6FA5A7}"/>
+                <a16:creationId xmlns:a16="http://schemas.microsoft.com/office/drawing/2014/main" id="{40A4ED90-4070-EFB6-1B91-208279AA0F60}"/>
               </a:ext>
             </a:extLst>
           </p:cNvPr>
@@ -4796,7 +4796,7 @@
           <p:cNvPr id="4" name="Subtitle">
             <a:extLst>
               <a:ext uri="{FF2B5EF4-FFF2-40B4-BE49-F238E27FC236}">
-                <a16:creationId xmlns:a16="http://schemas.microsoft.com/office/drawing/2014/main" id="{8FF9F85D-FBF1-6D45-77AB-0D7087D71477}"/>
+                <a16:creationId xmlns:a16="http://schemas.microsoft.com/office/drawing/2014/main" id="{DDCBF7D2-E9E2-C939-7CC9-264B58F47DE5}"/>
               </a:ext>
             </a:extLst>
           </p:cNvPr>
@@ -4859,7 +4859,7 @@
           <p:cNvPr id="5" name="직선 연결선 4">
             <a:extLst>
               <a:ext uri="{FF2B5EF4-FFF2-40B4-BE49-F238E27FC236}">
-                <a16:creationId xmlns:a16="http://schemas.microsoft.com/office/drawing/2014/main" id="{F59DCF9A-F0D0-4793-81D7-A8FFA7B83349}"/>
+                <a16:creationId xmlns:a16="http://schemas.microsoft.com/office/drawing/2014/main" id="{9495D3EF-3B52-12F4-9A2F-05BAD5F6D7BE}"/>
               </a:ext>
             </a:extLst>
           </p:cNvPr>
@@ -4900,7 +4900,7 @@
           <p:cNvPr id="6" name="사각형: 둥근 모서리 5">
             <a:extLst>
               <a:ext uri="{FF2B5EF4-FFF2-40B4-BE49-F238E27FC236}">
-                <a16:creationId xmlns:a16="http://schemas.microsoft.com/office/drawing/2014/main" id="{E57F45E8-4899-0CBC-6E32-66508D1BD294}"/>
+                <a16:creationId xmlns:a16="http://schemas.microsoft.com/office/drawing/2014/main" id="{0936631E-5FB5-8074-F5FD-BFCC304BFD11}"/>
               </a:ext>
             </a:extLst>
           </p:cNvPr>
@@ -4963,7 +4963,7 @@
           <p:cNvPr id="7" name="Column Heading">
             <a:extLst>
               <a:ext uri="{FF2B5EF4-FFF2-40B4-BE49-F238E27FC236}">
-                <a16:creationId xmlns:a16="http://schemas.microsoft.com/office/drawing/2014/main" id="{D3835070-B08A-430A-312C-38CAF4745C22}"/>
+                <a16:creationId xmlns:a16="http://schemas.microsoft.com/office/drawing/2014/main" id="{4E320B78-3E66-F26A-1E22-9CA0BFA55CD9}"/>
               </a:ext>
             </a:extLst>
           </p:cNvPr>
@@ -5026,7 +5026,7 @@
           <p:cNvPr id="8" name="직선 연결선 7">
             <a:extLst>
               <a:ext uri="{FF2B5EF4-FFF2-40B4-BE49-F238E27FC236}">
-                <a16:creationId xmlns:a16="http://schemas.microsoft.com/office/drawing/2014/main" id="{72268AF2-12F5-B306-ADBD-30CD77292C37}"/>
+                <a16:creationId xmlns:a16="http://schemas.microsoft.com/office/drawing/2014/main" id="{92AF6CDF-CBB9-A055-80F6-0A503A1EC572}"/>
               </a:ext>
             </a:extLst>
           </p:cNvPr>
@@ -5067,7 +5067,7 @@
           <p:cNvPr id="9" name="Column Body">
             <a:extLst>
               <a:ext uri="{FF2B5EF4-FFF2-40B4-BE49-F238E27FC236}">
-                <a16:creationId xmlns:a16="http://schemas.microsoft.com/office/drawing/2014/main" id="{94D76A2A-AEB3-6502-B5B9-84E902A2C77F}"/>
+                <a16:creationId xmlns:a16="http://schemas.microsoft.com/office/drawing/2014/main" id="{8AD5CC70-FB88-60E5-A92D-9FDB0660B0D5}"/>
               </a:ext>
             </a:extLst>
           </p:cNvPr>
@@ -5200,7 +5200,7 @@
           <p:cNvPr id="10" name="사각형: 둥근 모서리 9">
             <a:extLst>
               <a:ext uri="{FF2B5EF4-FFF2-40B4-BE49-F238E27FC236}">
-                <a16:creationId xmlns:a16="http://schemas.microsoft.com/office/drawing/2014/main" id="{2344A281-CE2B-397E-3C29-B777D7BB76CA}"/>
+                <a16:creationId xmlns:a16="http://schemas.microsoft.com/office/drawing/2014/main" id="{52620CE4-CE4A-BD74-D9A3-AF2B518920A3}"/>
               </a:ext>
             </a:extLst>
           </p:cNvPr>
@@ -5263,7 +5263,7 @@
           <p:cNvPr id="11" name="Column Heading">
             <a:extLst>
               <a:ext uri="{FF2B5EF4-FFF2-40B4-BE49-F238E27FC236}">
-                <a16:creationId xmlns:a16="http://schemas.microsoft.com/office/drawing/2014/main" id="{D8EE0C7E-478E-FE5E-F519-4DE47E54FF4D}"/>
+                <a16:creationId xmlns:a16="http://schemas.microsoft.com/office/drawing/2014/main" id="{487ED6ED-DC15-1CDE-5360-0E5EEAF03242}"/>
               </a:ext>
             </a:extLst>
           </p:cNvPr>
@@ -5316,7 +5316,7 @@
           <p:cNvPr id="12" name="직선 연결선 11">
             <a:extLst>
               <a:ext uri="{FF2B5EF4-FFF2-40B4-BE49-F238E27FC236}">
-                <a16:creationId xmlns:a16="http://schemas.microsoft.com/office/drawing/2014/main" id="{FB81D544-A8FD-EED3-D01A-8D958C92F971}"/>
+                <a16:creationId xmlns:a16="http://schemas.microsoft.com/office/drawing/2014/main" id="{50ABE44A-6FD4-9B65-2144-72D36158800A}"/>
               </a:ext>
             </a:extLst>
           </p:cNvPr>
@@ -5357,7 +5357,7 @@
           <p:cNvPr id="13" name="Column Body">
             <a:extLst>
               <a:ext uri="{FF2B5EF4-FFF2-40B4-BE49-F238E27FC236}">
-                <a16:creationId xmlns:a16="http://schemas.microsoft.com/office/drawing/2014/main" id="{540C17A2-41E3-78E2-C9E0-31396E5C286A}"/>
+                <a16:creationId xmlns:a16="http://schemas.microsoft.com/office/drawing/2014/main" id="{7A4EF8D4-26A9-59CF-76A6-0D4C404A6B7D}"/>
               </a:ext>
             </a:extLst>
           </p:cNvPr>
@@ -5463,7 +5463,7 @@
           <p:cNvPr id="14" name="사각형: 둥근 모서리 13">
             <a:extLst>
               <a:ext uri="{FF2B5EF4-FFF2-40B4-BE49-F238E27FC236}">
-                <a16:creationId xmlns:a16="http://schemas.microsoft.com/office/drawing/2014/main" id="{08018B67-875B-B5B4-FC95-00C36E410D51}"/>
+                <a16:creationId xmlns:a16="http://schemas.microsoft.com/office/drawing/2014/main" id="{484F52FB-9F93-79C8-279B-39A1799AA236}"/>
               </a:ext>
             </a:extLst>
           </p:cNvPr>
@@ -5526,7 +5526,7 @@
           <p:cNvPr id="15" name="Column Heading">
             <a:extLst>
               <a:ext uri="{FF2B5EF4-FFF2-40B4-BE49-F238E27FC236}">
-                <a16:creationId xmlns:a16="http://schemas.microsoft.com/office/drawing/2014/main" id="{D957D5B5-E2B5-E93B-1583-035438750332}"/>
+                <a16:creationId xmlns:a16="http://schemas.microsoft.com/office/drawing/2014/main" id="{9ED0C4E9-535B-E761-EABD-763C4CC56EB1}"/>
               </a:ext>
             </a:extLst>
           </p:cNvPr>
@@ -5569,7 +5569,7 @@
           <p:cNvPr id="16" name="직선 연결선 15">
             <a:extLst>
               <a:ext uri="{FF2B5EF4-FFF2-40B4-BE49-F238E27FC236}">
-                <a16:creationId xmlns:a16="http://schemas.microsoft.com/office/drawing/2014/main" id="{256E7A94-57B3-1485-AB37-8EA7486EA3AC}"/>
+                <a16:creationId xmlns:a16="http://schemas.microsoft.com/office/drawing/2014/main" id="{6498169D-FD10-5F23-41D2-B2BEB0C96BFF}"/>
               </a:ext>
             </a:extLst>
           </p:cNvPr>
@@ -5610,7 +5610,7 @@
           <p:cNvPr id="17" name="Column Body">
             <a:extLst>
               <a:ext uri="{FF2B5EF4-FFF2-40B4-BE49-F238E27FC236}">
-                <a16:creationId xmlns:a16="http://schemas.microsoft.com/office/drawing/2014/main" id="{10B522F7-1F42-1A5C-E400-FFF1A78CF485}"/>
+                <a16:creationId xmlns:a16="http://schemas.microsoft.com/office/drawing/2014/main" id="{89C03BB7-AF2C-1278-1F63-BF9FA4DC0747}"/>
               </a:ext>
             </a:extLst>
           </p:cNvPr>
@@ -5703,7 +5703,7 @@
           <p:cNvPr id="18" name="Finding">
             <a:extLst>
               <a:ext uri="{FF2B5EF4-FFF2-40B4-BE49-F238E27FC236}">
-                <a16:creationId xmlns:a16="http://schemas.microsoft.com/office/drawing/2014/main" id="{50ED1CEF-9D0F-8897-B9E6-D64AFC6113F2}"/>
+                <a16:creationId xmlns:a16="http://schemas.microsoft.com/office/drawing/2014/main" id="{922DC194-257F-4561-1343-836B810CAC39}"/>
               </a:ext>
             </a:extLst>
           </p:cNvPr>
@@ -5764,7 +5764,7 @@
           <p:cNvPr id="19" name="Footer">
             <a:extLst>
               <a:ext uri="{FF2B5EF4-FFF2-40B4-BE49-F238E27FC236}">
-                <a16:creationId xmlns:a16="http://schemas.microsoft.com/office/drawing/2014/main" id="{8A712E13-D6E0-2E30-90A2-258F3F04DDCA}"/>
+                <a16:creationId xmlns:a16="http://schemas.microsoft.com/office/drawing/2014/main" id="{D50FCDCB-A915-9A5C-E626-BF2126EA265B}"/>
               </a:ext>
             </a:extLst>
           </p:cNvPr>
@@ -5827,7 +5827,7 @@
           <p:cNvPr id="20" name="Slide Number">
             <a:extLst>
               <a:ext uri="{FF2B5EF4-FFF2-40B4-BE49-F238E27FC236}">
-                <a16:creationId xmlns:a16="http://schemas.microsoft.com/office/drawing/2014/main" id="{F0620995-508A-3358-EAE0-967A18EAF423}"/>
+                <a16:creationId xmlns:a16="http://schemas.microsoft.com/office/drawing/2014/main" id="{1B0D2400-9983-C264-D2EC-3224B5341F3E}"/>
               </a:ext>
             </a:extLst>
           </p:cNvPr>
@@ -5876,7 +5876,7 @@
     </p:spTree>
     <p:extLst>
       <p:ext uri="{BB962C8B-B14F-4D97-AF65-F5344CB8AC3E}">
-        <p14:creationId xmlns:p14="http://schemas.microsoft.com/office/powerpoint/2010/main" val="3491279231"/>
+        <p14:creationId xmlns:p14="http://schemas.microsoft.com/office/powerpoint/2010/main" val="2450658355"/>
       </p:ext>
     </p:extLst>
   </p:cSld>
@@ -5908,7 +5908,7 @@
           <p:cNvPr id="2" name="직사각형 1">
             <a:extLst>
               <a:ext uri="{FF2B5EF4-FFF2-40B4-BE49-F238E27FC236}">
-                <a16:creationId xmlns:a16="http://schemas.microsoft.com/office/drawing/2014/main" id="{4B207AD9-7494-3829-3E38-F0BC2ADD8AB2}"/>
+                <a16:creationId xmlns:a16="http://schemas.microsoft.com/office/drawing/2014/main" id="{92FA9031-F3D7-64C5-98A2-4FDDEE8F295C}"/>
               </a:ext>
             </a:extLst>
           </p:cNvPr>
@@ -5976,7 +5976,7 @@
           <p:cNvPr id="3" name="Title">
             <a:extLst>
               <a:ext uri="{FF2B5EF4-FFF2-40B4-BE49-F238E27FC236}">
-                <a16:creationId xmlns:a16="http://schemas.microsoft.com/office/drawing/2014/main" id="{85315EC7-F389-AB00-AAA5-0947E719DD25}"/>
+                <a16:creationId xmlns:a16="http://schemas.microsoft.com/office/drawing/2014/main" id="{91980CE5-CBE2-CFBD-D800-42EA32156F25}"/>
               </a:ext>
             </a:extLst>
           </p:cNvPr>
@@ -6019,7 +6019,7 @@
           <p:cNvPr id="4" name="Subtitle">
             <a:extLst>
               <a:ext uri="{FF2B5EF4-FFF2-40B4-BE49-F238E27FC236}">
-                <a16:creationId xmlns:a16="http://schemas.microsoft.com/office/drawing/2014/main" id="{21DAD41B-2988-821E-65D1-EEADF9BB3AD1}"/>
+                <a16:creationId xmlns:a16="http://schemas.microsoft.com/office/drawing/2014/main" id="{1491718D-10F0-84F3-4D88-F5CA9FB70054}"/>
               </a:ext>
             </a:extLst>
           </p:cNvPr>
@@ -6072,7 +6072,7 @@
           <p:cNvPr id="5" name="직선 연결선 4">
             <a:extLst>
               <a:ext uri="{FF2B5EF4-FFF2-40B4-BE49-F238E27FC236}">
-                <a16:creationId xmlns:a16="http://schemas.microsoft.com/office/drawing/2014/main" id="{956F857E-17DB-B911-4595-8AACC76A2271}"/>
+                <a16:creationId xmlns:a16="http://schemas.microsoft.com/office/drawing/2014/main" id="{2903E1B9-1872-7D80-D2D7-5B882E228D8C}"/>
               </a:ext>
             </a:extLst>
           </p:cNvPr>
@@ -6113,7 +6113,7 @@
           <p:cNvPr id="6" name="Step No">
             <a:extLst>
               <a:ext uri="{FF2B5EF4-FFF2-40B4-BE49-F238E27FC236}">
-                <a16:creationId xmlns:a16="http://schemas.microsoft.com/office/drawing/2014/main" id="{58ABF9BA-5793-9970-977F-845E5CD99415}"/>
+                <a16:creationId xmlns:a16="http://schemas.microsoft.com/office/drawing/2014/main" id="{50498E78-6D75-9777-B34E-D7E417EEE460}"/>
               </a:ext>
             </a:extLst>
           </p:cNvPr>
@@ -6163,7 +6163,7 @@
           <p:cNvPr id="7" name="Step">
             <a:extLst>
               <a:ext uri="{FF2B5EF4-FFF2-40B4-BE49-F238E27FC236}">
-                <a16:creationId xmlns:a16="http://schemas.microsoft.com/office/drawing/2014/main" id="{E0AD9DD0-E425-85FF-217E-B0E0C11491F4}"/>
+                <a16:creationId xmlns:a16="http://schemas.microsoft.com/office/drawing/2014/main" id="{AAD26AC8-CCBD-F3C6-3E04-171A1640391C}"/>
               </a:ext>
             </a:extLst>
           </p:cNvPr>
@@ -6246,7 +6246,7 @@
           <p:cNvPr id="8" name="직선 연결선 7">
             <a:extLst>
               <a:ext uri="{FF2B5EF4-FFF2-40B4-BE49-F238E27FC236}">
-                <a16:creationId xmlns:a16="http://schemas.microsoft.com/office/drawing/2014/main" id="{4A7DC0E6-E094-6931-463C-6A28B705B1FD}"/>
+                <a16:creationId xmlns:a16="http://schemas.microsoft.com/office/drawing/2014/main" id="{E9976951-7CD1-106C-0CEC-53D751F2F30F}"/>
               </a:ext>
             </a:extLst>
           </p:cNvPr>
@@ -6288,7 +6288,7 @@
           <p:cNvPr id="9" name="Step No">
             <a:extLst>
               <a:ext uri="{FF2B5EF4-FFF2-40B4-BE49-F238E27FC236}">
-                <a16:creationId xmlns:a16="http://schemas.microsoft.com/office/drawing/2014/main" id="{4DB0688F-A2CD-1659-1883-E9A7D417FC85}"/>
+                <a16:creationId xmlns:a16="http://schemas.microsoft.com/office/drawing/2014/main" id="{9079D382-099B-6920-E66C-C84D1BE55DC6}"/>
               </a:ext>
             </a:extLst>
           </p:cNvPr>
@@ -6338,7 +6338,7 @@
           <p:cNvPr id="10" name="Step">
             <a:extLst>
               <a:ext uri="{FF2B5EF4-FFF2-40B4-BE49-F238E27FC236}">
-                <a16:creationId xmlns:a16="http://schemas.microsoft.com/office/drawing/2014/main" id="{527FB62A-E636-F42A-E5D6-D6522B9F3F60}"/>
+                <a16:creationId xmlns:a16="http://schemas.microsoft.com/office/drawing/2014/main" id="{20C8751A-8BE8-C36A-9223-69BB7C397063}"/>
               </a:ext>
             </a:extLst>
           </p:cNvPr>
@@ -6421,7 +6421,7 @@
           <p:cNvPr id="11" name="직선 연결선 10">
             <a:extLst>
               <a:ext uri="{FF2B5EF4-FFF2-40B4-BE49-F238E27FC236}">
-                <a16:creationId xmlns:a16="http://schemas.microsoft.com/office/drawing/2014/main" id="{A99BF3E0-63A7-3CFB-7D29-D265D33BE887}"/>
+                <a16:creationId xmlns:a16="http://schemas.microsoft.com/office/drawing/2014/main" id="{6A845CDC-740A-07F5-0BBE-3CFE83E5B48D}"/>
               </a:ext>
             </a:extLst>
           </p:cNvPr>
@@ -6463,7 +6463,7 @@
           <p:cNvPr id="12" name="Step No">
             <a:extLst>
               <a:ext uri="{FF2B5EF4-FFF2-40B4-BE49-F238E27FC236}">
-                <a16:creationId xmlns:a16="http://schemas.microsoft.com/office/drawing/2014/main" id="{689E9BF4-5248-F11E-780E-583FBE62B450}"/>
+                <a16:creationId xmlns:a16="http://schemas.microsoft.com/office/drawing/2014/main" id="{62F6805F-8DD4-11EF-AB78-70C44952FD40}"/>
               </a:ext>
             </a:extLst>
           </p:cNvPr>
@@ -6513,7 +6513,7 @@
           <p:cNvPr id="13" name="Step">
             <a:extLst>
               <a:ext uri="{FF2B5EF4-FFF2-40B4-BE49-F238E27FC236}">
-                <a16:creationId xmlns:a16="http://schemas.microsoft.com/office/drawing/2014/main" id="{6DE33597-CBCB-69EE-9A3B-09822611A767}"/>
+                <a16:creationId xmlns:a16="http://schemas.microsoft.com/office/drawing/2014/main" id="{33066C8B-0D93-5787-173B-75FD43768CF9}"/>
               </a:ext>
             </a:extLst>
           </p:cNvPr>
@@ -6596,7 +6596,7 @@
           <p:cNvPr id="14" name="직선 연결선 13">
             <a:extLst>
               <a:ext uri="{FF2B5EF4-FFF2-40B4-BE49-F238E27FC236}">
-                <a16:creationId xmlns:a16="http://schemas.microsoft.com/office/drawing/2014/main" id="{8D06824E-C716-B0DB-2453-D0DE47CBD15A}"/>
+                <a16:creationId xmlns:a16="http://schemas.microsoft.com/office/drawing/2014/main" id="{F000E03B-8B6D-6A72-3513-F3971179F6A5}"/>
               </a:ext>
             </a:extLst>
           </p:cNvPr>
@@ -6638,7 +6638,7 @@
           <p:cNvPr id="15" name="Step No">
             <a:extLst>
               <a:ext uri="{FF2B5EF4-FFF2-40B4-BE49-F238E27FC236}">
-                <a16:creationId xmlns:a16="http://schemas.microsoft.com/office/drawing/2014/main" id="{DBD8B6E7-DD34-B7C0-803A-C29963922613}"/>
+                <a16:creationId xmlns:a16="http://schemas.microsoft.com/office/drawing/2014/main" id="{870458CD-55E2-F449-93D2-A3BE601A7B50}"/>
               </a:ext>
             </a:extLst>
           </p:cNvPr>
@@ -6688,7 +6688,7 @@
           <p:cNvPr id="16" name="Step">
             <a:extLst>
               <a:ext uri="{FF2B5EF4-FFF2-40B4-BE49-F238E27FC236}">
-                <a16:creationId xmlns:a16="http://schemas.microsoft.com/office/drawing/2014/main" id="{0B1D6A1A-D729-FAFF-AF69-37D987ABF464}"/>
+                <a16:creationId xmlns:a16="http://schemas.microsoft.com/office/drawing/2014/main" id="{BF5DBB2C-C7AA-BBCC-DFCF-EFA30911E3C2}"/>
               </a:ext>
             </a:extLst>
           </p:cNvPr>
@@ -6764,7 +6764,7 @@
                 <a:latin typeface="Malgun Gothic" panose="020B0503020000020004" pitchFamily="50" charset="-127"/>
                 <a:ea typeface="Malgun Gothic" panose="020B0503020000020004" pitchFamily="50" charset="-127"/>
               </a:rPr>
-              <a:t>apply_notification_policy</a:t>
+              <a:t>propose_notification_policy</a:t>
             </a:r>
             <a:endParaRPr lang="ko-KR" altLang="en-US" sz="1000" b="1">
               <a:solidFill>
@@ -6781,7 +6781,7 @@
           <p:cNvPr id="17" name="직선 연결선 16">
             <a:extLst>
               <a:ext uri="{FF2B5EF4-FFF2-40B4-BE49-F238E27FC236}">
-                <a16:creationId xmlns:a16="http://schemas.microsoft.com/office/drawing/2014/main" id="{E0BDCE6B-86EC-3F67-B863-0D1CAC15F1E1}"/>
+                <a16:creationId xmlns:a16="http://schemas.microsoft.com/office/drawing/2014/main" id="{16803628-D157-2C61-F1FB-708B3CB2B116}"/>
               </a:ext>
             </a:extLst>
           </p:cNvPr>
@@ -6823,7 +6823,7 @@
           <p:cNvPr id="18" name="Step No">
             <a:extLst>
               <a:ext uri="{FF2B5EF4-FFF2-40B4-BE49-F238E27FC236}">
-                <a16:creationId xmlns:a16="http://schemas.microsoft.com/office/drawing/2014/main" id="{CD9E68A2-81A7-2BA4-8420-C46DF57632C8}"/>
+                <a16:creationId xmlns:a16="http://schemas.microsoft.com/office/drawing/2014/main" id="{2941F971-D129-E60A-AAAC-C66EC97A0543}"/>
               </a:ext>
             </a:extLst>
           </p:cNvPr>
@@ -6873,7 +6873,7 @@
           <p:cNvPr id="19" name="Step">
             <a:extLst>
               <a:ext uri="{FF2B5EF4-FFF2-40B4-BE49-F238E27FC236}">
-                <a16:creationId xmlns:a16="http://schemas.microsoft.com/office/drawing/2014/main" id="{44E674B5-D1F2-E122-3153-791EFA5A5250}"/>
+                <a16:creationId xmlns:a16="http://schemas.microsoft.com/office/drawing/2014/main" id="{2C0E7532-C610-9E18-575E-A176210436C6}"/>
               </a:ext>
             </a:extLst>
           </p:cNvPr>
@@ -6949,7 +6949,7 @@
           <p:cNvPr id="20" name="Break">
             <a:extLst>
               <a:ext uri="{FF2B5EF4-FFF2-40B4-BE49-F238E27FC236}">
-                <a16:creationId xmlns:a16="http://schemas.microsoft.com/office/drawing/2014/main" id="{D2DF9490-88BA-4B9C-F77F-22CC3850F537}"/>
+                <a16:creationId xmlns:a16="http://schemas.microsoft.com/office/drawing/2014/main" id="{99E586A2-60DE-5213-2C58-DEBB84990E81}"/>
               </a:ext>
             </a:extLst>
           </p:cNvPr>
@@ -7055,7 +7055,7 @@
           <p:cNvPr id="21" name="직선 연결선 20">
             <a:extLst>
               <a:ext uri="{FF2B5EF4-FFF2-40B4-BE49-F238E27FC236}">
-                <a16:creationId xmlns:a16="http://schemas.microsoft.com/office/drawing/2014/main" id="{66723DD1-BA98-987E-CB7D-37CAAB209C60}"/>
+                <a16:creationId xmlns:a16="http://schemas.microsoft.com/office/drawing/2014/main" id="{E987AC45-25D5-889F-5813-3EC2BEAFC47C}"/>
               </a:ext>
             </a:extLst>
           </p:cNvPr>
@@ -7097,7 +7097,7 @@
           <p:cNvPr id="22" name="Condition">
             <a:extLst>
               <a:ext uri="{FF2B5EF4-FFF2-40B4-BE49-F238E27FC236}">
-                <a16:creationId xmlns:a16="http://schemas.microsoft.com/office/drawing/2014/main" id="{934BD34F-3421-058B-5F2A-56F9DE8E2527}"/>
+                <a16:creationId xmlns:a16="http://schemas.microsoft.com/office/drawing/2014/main" id="{81167E9C-0761-0206-A0E4-4EFB3FF8AC7F}"/>
               </a:ext>
             </a:extLst>
           </p:cNvPr>
@@ -7180,7 +7180,7 @@
                 <a:latin typeface="Malgun Gothic" panose="020B0503020000020004" pitchFamily="50" charset="-127"/>
                 <a:ea typeface="Malgun Gothic" panose="020B0503020000020004" pitchFamily="50" charset="-127"/>
               </a:rPr>
-              <a:t>apply_notification_policy Tool call</a:t>
+              <a:t>propose_notification_policy Tool call</a:t>
             </a:r>
             <a:r>
               <a:rPr lang="ko-KR" altLang="en-US" sz="1300" b="1">
@@ -7217,7 +7217,7 @@
           <p:cNvPr id="23" name="Footer">
             <a:extLst>
               <a:ext uri="{FF2B5EF4-FFF2-40B4-BE49-F238E27FC236}">
-                <a16:creationId xmlns:a16="http://schemas.microsoft.com/office/drawing/2014/main" id="{0B68E2F8-207E-6DB9-6B73-323DC65EF386}"/>
+                <a16:creationId xmlns:a16="http://schemas.microsoft.com/office/drawing/2014/main" id="{771E5AC5-7CD0-7BE4-6E2F-DD8406B33451}"/>
               </a:ext>
             </a:extLst>
           </p:cNvPr>
@@ -7300,7 +7300,7 @@
           <p:cNvPr id="24" name="Slide Number">
             <a:extLst>
               <a:ext uri="{FF2B5EF4-FFF2-40B4-BE49-F238E27FC236}">
-                <a16:creationId xmlns:a16="http://schemas.microsoft.com/office/drawing/2014/main" id="{3AAC435D-83BB-1188-9FDA-5F83040B4384}"/>
+                <a16:creationId xmlns:a16="http://schemas.microsoft.com/office/drawing/2014/main" id="{DC303C5E-4E77-0AFA-2CBF-9ED2B2726C59}"/>
               </a:ext>
             </a:extLst>
           </p:cNvPr>
@@ -7349,7 +7349,7 @@
     </p:spTree>
     <p:extLst>
       <p:ext uri="{BB962C8B-B14F-4D97-AF65-F5344CB8AC3E}">
-        <p14:creationId xmlns:p14="http://schemas.microsoft.com/office/powerpoint/2010/main" val="3988147383"/>
+        <p14:creationId xmlns:p14="http://schemas.microsoft.com/office/powerpoint/2010/main" val="1113303523"/>
       </p:ext>
     </p:extLst>
   </p:cSld>
@@ -7381,7 +7381,7 @@
           <p:cNvPr id="2" name="직사각형 1">
             <a:extLst>
               <a:ext uri="{FF2B5EF4-FFF2-40B4-BE49-F238E27FC236}">
-                <a16:creationId xmlns:a16="http://schemas.microsoft.com/office/drawing/2014/main" id="{CB27D340-0E3E-74A0-025E-8607289AB9E2}"/>
+                <a16:creationId xmlns:a16="http://schemas.microsoft.com/office/drawing/2014/main" id="{999AB153-664C-46C1-97C8-37A4FC0335A0}"/>
               </a:ext>
             </a:extLst>
           </p:cNvPr>
@@ -7449,7 +7449,7 @@
           <p:cNvPr id="3" name="Title">
             <a:extLst>
               <a:ext uri="{FF2B5EF4-FFF2-40B4-BE49-F238E27FC236}">
-                <a16:creationId xmlns:a16="http://schemas.microsoft.com/office/drawing/2014/main" id="{DD9476F4-9620-A1B9-03DB-8D78A1B864FC}"/>
+                <a16:creationId xmlns:a16="http://schemas.microsoft.com/office/drawing/2014/main" id="{3D7A7ED1-60AC-ADA1-AC84-F76C957AC80A}"/>
               </a:ext>
             </a:extLst>
           </p:cNvPr>
@@ -7492,7 +7492,7 @@
           <p:cNvPr id="4" name="Subtitle">
             <a:extLst>
               <a:ext uri="{FF2B5EF4-FFF2-40B4-BE49-F238E27FC236}">
-                <a16:creationId xmlns:a16="http://schemas.microsoft.com/office/drawing/2014/main" id="{B0BBB3FA-FCF2-E531-F620-B4EF5D81C786}"/>
+                <a16:creationId xmlns:a16="http://schemas.microsoft.com/office/drawing/2014/main" id="{5CEE312D-3CAC-38F3-5FF3-F974498924C8}"/>
               </a:ext>
             </a:extLst>
           </p:cNvPr>
@@ -7535,7 +7535,7 @@
           <p:cNvPr id="5" name="직선 연결선 4">
             <a:extLst>
               <a:ext uri="{FF2B5EF4-FFF2-40B4-BE49-F238E27FC236}">
-                <a16:creationId xmlns:a16="http://schemas.microsoft.com/office/drawing/2014/main" id="{D6A51355-3423-853A-7022-5F0515116541}"/>
+                <a16:creationId xmlns:a16="http://schemas.microsoft.com/office/drawing/2014/main" id="{9A5AB786-BEFE-3796-737E-EC9DB302383D}"/>
               </a:ext>
             </a:extLst>
           </p:cNvPr>
@@ -7576,7 +7576,7 @@
           <p:cNvPr id="6" name="Prompt A">
             <a:extLst>
               <a:ext uri="{FF2B5EF4-FFF2-40B4-BE49-F238E27FC236}">
-                <a16:creationId xmlns:a16="http://schemas.microsoft.com/office/drawing/2014/main" id="{A135AB1B-407E-7790-F5D3-17B69C1C33BB}"/>
+                <a16:creationId xmlns:a16="http://schemas.microsoft.com/office/drawing/2014/main" id="{84AEC1E0-3EA8-1649-3B68-6D54602AD29C}"/>
               </a:ext>
             </a:extLst>
           </p:cNvPr>
@@ -7682,7 +7682,7 @@
           <p:cNvPr id="7" name="Prompt B">
             <a:extLst>
               <a:ext uri="{FF2B5EF4-FFF2-40B4-BE49-F238E27FC236}">
-                <a16:creationId xmlns:a16="http://schemas.microsoft.com/office/drawing/2014/main" id="{282BB565-4098-DBD6-EE37-B5561561BE8F}"/>
+                <a16:creationId xmlns:a16="http://schemas.microsoft.com/office/drawing/2014/main" id="{C784774D-EBFA-0897-7066-DAD48A364A1C}"/>
               </a:ext>
             </a:extLst>
           </p:cNvPr>
@@ -7788,7 +7788,7 @@
           <p:cNvPr id="8" name="직선 연결선 7">
             <a:extLst>
               <a:ext uri="{FF2B5EF4-FFF2-40B4-BE49-F238E27FC236}">
-                <a16:creationId xmlns:a16="http://schemas.microsoft.com/office/drawing/2014/main" id="{DF3D3283-AE6D-B5AD-8F05-312ECC224C68}"/>
+                <a16:creationId xmlns:a16="http://schemas.microsoft.com/office/drawing/2014/main" id="{E1F5B3D3-A268-93D2-A85A-685AC4119365}"/>
               </a:ext>
             </a:extLst>
           </p:cNvPr>
@@ -7830,7 +7830,7 @@
           <p:cNvPr id="9" name="직선 연결선 8">
             <a:extLst>
               <a:ext uri="{FF2B5EF4-FFF2-40B4-BE49-F238E27FC236}">
-                <a16:creationId xmlns:a16="http://schemas.microsoft.com/office/drawing/2014/main" id="{D7DAADAA-2160-4174-96E6-6AD2E564FB78}"/>
+                <a16:creationId xmlns:a16="http://schemas.microsoft.com/office/drawing/2014/main" id="{CEB8B7CD-240E-29F1-0A5D-20BC64B94218}"/>
               </a:ext>
             </a:extLst>
           </p:cNvPr>
@@ -7872,7 +7872,7 @@
           <p:cNvPr id="10" name="Decision">
             <a:extLst>
               <a:ext uri="{FF2B5EF4-FFF2-40B4-BE49-F238E27FC236}">
-                <a16:creationId xmlns:a16="http://schemas.microsoft.com/office/drawing/2014/main" id="{49F1F1FB-6A89-1981-8796-F968DCE0E92D}"/>
+                <a16:creationId xmlns:a16="http://schemas.microsoft.com/office/drawing/2014/main" id="{3B3808AB-4205-823E-7361-E0450C75A702}"/>
               </a:ext>
             </a:extLst>
           </p:cNvPr>
@@ -7988,7 +7988,7 @@
           <p:cNvPr id="11" name="Root Cause">
             <a:extLst>
               <a:ext uri="{FF2B5EF4-FFF2-40B4-BE49-F238E27FC236}">
-                <a16:creationId xmlns:a16="http://schemas.microsoft.com/office/drawing/2014/main" id="{9DD59998-B170-9B95-1D08-65B3EC6F39B9}"/>
+                <a16:creationId xmlns:a16="http://schemas.microsoft.com/office/drawing/2014/main" id="{11A1BCDC-FC3F-4A52-9764-C21AD00DA7D3}"/>
               </a:ext>
             </a:extLst>
           </p:cNvPr>
@@ -8069,7 +8069,7 @@
           <p:cNvPr id="12" name="Footer">
             <a:extLst>
               <a:ext uri="{FF2B5EF4-FFF2-40B4-BE49-F238E27FC236}">
-                <a16:creationId xmlns:a16="http://schemas.microsoft.com/office/drawing/2014/main" id="{190D10BC-4666-E718-B0FA-5065DD40D93A}"/>
+                <a16:creationId xmlns:a16="http://schemas.microsoft.com/office/drawing/2014/main" id="{DFD0BA4D-C5CD-7D8A-ECD6-CEF2A7C22755}"/>
               </a:ext>
             </a:extLst>
           </p:cNvPr>
@@ -8132,7 +8132,7 @@
           <p:cNvPr id="13" name="Slide Number">
             <a:extLst>
               <a:ext uri="{FF2B5EF4-FFF2-40B4-BE49-F238E27FC236}">
-                <a16:creationId xmlns:a16="http://schemas.microsoft.com/office/drawing/2014/main" id="{43EBFB4C-A3D2-9D4A-704B-1DDC58C4D6F5}"/>
+                <a16:creationId xmlns:a16="http://schemas.microsoft.com/office/drawing/2014/main" id="{2D35EF15-349E-335B-94E2-1DC17F564D25}"/>
               </a:ext>
             </a:extLst>
           </p:cNvPr>
@@ -8181,7 +8181,7 @@
     </p:spTree>
     <p:extLst>
       <p:ext uri="{BB962C8B-B14F-4D97-AF65-F5344CB8AC3E}">
-        <p14:creationId xmlns:p14="http://schemas.microsoft.com/office/powerpoint/2010/main" val="1756158331"/>
+        <p14:creationId xmlns:p14="http://schemas.microsoft.com/office/powerpoint/2010/main" val="779096182"/>
       </p:ext>
     </p:extLst>
   </p:cSld>
@@ -8213,7 +8213,7 @@
           <p:cNvPr id="2" name="직사각형 1">
             <a:extLst>
               <a:ext uri="{FF2B5EF4-FFF2-40B4-BE49-F238E27FC236}">
-                <a16:creationId xmlns:a16="http://schemas.microsoft.com/office/drawing/2014/main" id="{C79DAB89-40A7-5258-FE4D-B9B6070AB243}"/>
+                <a16:creationId xmlns:a16="http://schemas.microsoft.com/office/drawing/2014/main" id="{9B99CAD1-7C39-D1C4-E30D-2C4EC98E2AB9}"/>
               </a:ext>
             </a:extLst>
           </p:cNvPr>
@@ -8281,7 +8281,7 @@
           <p:cNvPr id="3" name="Title">
             <a:extLst>
               <a:ext uri="{FF2B5EF4-FFF2-40B4-BE49-F238E27FC236}">
-                <a16:creationId xmlns:a16="http://schemas.microsoft.com/office/drawing/2014/main" id="{1DCAE0BE-8F4C-CE45-8511-381B555BE8DD}"/>
+                <a16:creationId xmlns:a16="http://schemas.microsoft.com/office/drawing/2014/main" id="{5B70D0E0-5DB1-9C28-788F-6B724022DE90}"/>
               </a:ext>
             </a:extLst>
           </p:cNvPr>
@@ -8324,7 +8324,7 @@
           <p:cNvPr id="4" name="Subtitle">
             <a:extLst>
               <a:ext uri="{FF2B5EF4-FFF2-40B4-BE49-F238E27FC236}">
-                <a16:creationId xmlns:a16="http://schemas.microsoft.com/office/drawing/2014/main" id="{A002E2DD-41AE-8939-2DC0-5FEE5CA7B69A}"/>
+                <a16:creationId xmlns:a16="http://schemas.microsoft.com/office/drawing/2014/main" id="{BDA60761-43C8-DBC1-B7C4-F5AD137152D2}"/>
               </a:ext>
             </a:extLst>
           </p:cNvPr>
@@ -8387,7 +8387,7 @@
           <p:cNvPr id="5" name="직선 연결선 4">
             <a:extLst>
               <a:ext uri="{FF2B5EF4-FFF2-40B4-BE49-F238E27FC236}">
-                <a16:creationId xmlns:a16="http://schemas.microsoft.com/office/drawing/2014/main" id="{3C0596F4-7283-A5D5-F42E-6F6703710D23}"/>
+                <a16:creationId xmlns:a16="http://schemas.microsoft.com/office/drawing/2014/main" id="{02DFDE58-1057-2F34-956C-D83723255BCA}"/>
               </a:ext>
             </a:extLst>
           </p:cNvPr>
@@ -8428,7 +8428,7 @@
           <p:cNvPr id="6" name="사각형: 둥근 모서리 5">
             <a:extLst>
               <a:ext uri="{FF2B5EF4-FFF2-40B4-BE49-F238E27FC236}">
-                <a16:creationId xmlns:a16="http://schemas.microsoft.com/office/drawing/2014/main" id="{A449B4D0-7CF0-0AE1-6371-100E6FC475A8}"/>
+                <a16:creationId xmlns:a16="http://schemas.microsoft.com/office/drawing/2014/main" id="{84E05273-7647-ED51-7770-509A4747EE6B}"/>
               </a:ext>
             </a:extLst>
           </p:cNvPr>
@@ -8501,7 +8501,7 @@
           <p:cNvPr id="7" name="Option">
             <a:extLst>
               <a:ext uri="{FF2B5EF4-FFF2-40B4-BE49-F238E27FC236}">
-                <a16:creationId xmlns:a16="http://schemas.microsoft.com/office/drawing/2014/main" id="{3EADA3CF-E1D1-D8FC-DCD5-3867C3A64102}"/>
+                <a16:creationId xmlns:a16="http://schemas.microsoft.com/office/drawing/2014/main" id="{44B94AA9-BBAC-75A6-4FDF-AD33747D643C}"/>
               </a:ext>
             </a:extLst>
           </p:cNvPr>
@@ -8596,7 +8596,7 @@
           <p:cNvPr id="8" name="사각형: 둥근 모서리 7">
             <a:extLst>
               <a:ext uri="{FF2B5EF4-FFF2-40B4-BE49-F238E27FC236}">
-                <a16:creationId xmlns:a16="http://schemas.microsoft.com/office/drawing/2014/main" id="{C2B6D175-D2A6-81BC-BD5A-5D32BF51C2F7}"/>
+                <a16:creationId xmlns:a16="http://schemas.microsoft.com/office/drawing/2014/main" id="{29EFA683-8579-9D74-B447-256B8663EC18}"/>
               </a:ext>
             </a:extLst>
           </p:cNvPr>
@@ -8669,7 +8669,7 @@
           <p:cNvPr id="9" name="Option">
             <a:extLst>
               <a:ext uri="{FF2B5EF4-FFF2-40B4-BE49-F238E27FC236}">
-                <a16:creationId xmlns:a16="http://schemas.microsoft.com/office/drawing/2014/main" id="{47CBBAC3-82A0-AE7C-6E4C-06BE8577FB78}"/>
+                <a16:creationId xmlns:a16="http://schemas.microsoft.com/office/drawing/2014/main" id="{4B68F2A7-B638-A988-AFD4-C77D0A5B48E3}"/>
               </a:ext>
             </a:extLst>
           </p:cNvPr>
@@ -8804,7 +8804,7 @@
           <p:cNvPr id="10" name="사각형: 둥근 모서리 9">
             <a:extLst>
               <a:ext uri="{FF2B5EF4-FFF2-40B4-BE49-F238E27FC236}">
-                <a16:creationId xmlns:a16="http://schemas.microsoft.com/office/drawing/2014/main" id="{8C5A432C-C0A7-9E84-0D61-00CDDD1B2AA6}"/>
+                <a16:creationId xmlns:a16="http://schemas.microsoft.com/office/drawing/2014/main" id="{882473E8-8D2D-9D63-D526-611863ADB778}"/>
               </a:ext>
             </a:extLst>
           </p:cNvPr>
@@ -8877,7 +8877,7 @@
           <p:cNvPr id="11" name="Option">
             <a:extLst>
               <a:ext uri="{FF2B5EF4-FFF2-40B4-BE49-F238E27FC236}">
-                <a16:creationId xmlns:a16="http://schemas.microsoft.com/office/drawing/2014/main" id="{08F080C9-CE1B-1B58-9D39-CAB055A0BEF8}"/>
+                <a16:creationId xmlns:a16="http://schemas.microsoft.com/office/drawing/2014/main" id="{9F670C1E-E42D-4B83-74E1-66906E1DF513}"/>
               </a:ext>
             </a:extLst>
           </p:cNvPr>
@@ -8982,7 +8982,7 @@
           <p:cNvPr id="12" name="Recommendation">
             <a:extLst>
               <a:ext uri="{FF2B5EF4-FFF2-40B4-BE49-F238E27FC236}">
-                <a16:creationId xmlns:a16="http://schemas.microsoft.com/office/drawing/2014/main" id="{129914E0-E47A-B094-D272-DD8AC3499595}"/>
+                <a16:creationId xmlns:a16="http://schemas.microsoft.com/office/drawing/2014/main" id="{A8FDC782-0D97-DF17-73C1-E0A46BAE6551}"/>
               </a:ext>
             </a:extLst>
           </p:cNvPr>
@@ -9112,7 +9112,7 @@
           <p:cNvPr id="13" name="Footer">
             <a:extLst>
               <a:ext uri="{FF2B5EF4-FFF2-40B4-BE49-F238E27FC236}">
-                <a16:creationId xmlns:a16="http://schemas.microsoft.com/office/drawing/2014/main" id="{6350DB46-4CE2-BF0C-2764-468BB52AC684}"/>
+                <a16:creationId xmlns:a16="http://schemas.microsoft.com/office/drawing/2014/main" id="{3CB22AD1-8709-1EA9-A99F-CC305CEFF6C6}"/>
               </a:ext>
             </a:extLst>
           </p:cNvPr>
@@ -9212,7 +9212,7 @@
           <p:cNvPr id="14" name="Slide Number">
             <a:extLst>
               <a:ext uri="{FF2B5EF4-FFF2-40B4-BE49-F238E27FC236}">
-                <a16:creationId xmlns:a16="http://schemas.microsoft.com/office/drawing/2014/main" id="{D37B3E80-FB39-ABDA-65C0-9971C2021271}"/>
+                <a16:creationId xmlns:a16="http://schemas.microsoft.com/office/drawing/2014/main" id="{9F576589-0285-071C-8C0C-C6021C7E74A3}"/>
               </a:ext>
             </a:extLst>
           </p:cNvPr>
@@ -9261,7 +9261,7 @@
     </p:spTree>
     <p:extLst>
       <p:ext uri="{BB962C8B-B14F-4D97-AF65-F5344CB8AC3E}">
-        <p14:creationId xmlns:p14="http://schemas.microsoft.com/office/powerpoint/2010/main" val="3248727198"/>
+        <p14:creationId xmlns:p14="http://schemas.microsoft.com/office/powerpoint/2010/main" val="4029211214"/>
       </p:ext>
     </p:extLst>
   </p:cSld>
@@ -9293,7 +9293,7 @@
           <p:cNvPr id="2" name="직사각형 1">
             <a:extLst>
               <a:ext uri="{FF2B5EF4-FFF2-40B4-BE49-F238E27FC236}">
-                <a16:creationId xmlns:a16="http://schemas.microsoft.com/office/drawing/2014/main" id="{A6D0A413-70A8-DE98-4947-3E2B50518DF8}"/>
+                <a16:creationId xmlns:a16="http://schemas.microsoft.com/office/drawing/2014/main" id="{12B9EFE8-462C-C562-55FA-77A1B795C2C9}"/>
               </a:ext>
             </a:extLst>
           </p:cNvPr>
@@ -9361,7 +9361,7 @@
           <p:cNvPr id="3" name="Title">
             <a:extLst>
               <a:ext uri="{FF2B5EF4-FFF2-40B4-BE49-F238E27FC236}">
-                <a16:creationId xmlns:a16="http://schemas.microsoft.com/office/drawing/2014/main" id="{4263597A-6300-A06F-9E0C-DCEEDA1B20C4}"/>
+                <a16:creationId xmlns:a16="http://schemas.microsoft.com/office/drawing/2014/main" id="{DC8426B9-9EB1-3CA8-FCEE-E1FDDFF2B5BD}"/>
               </a:ext>
             </a:extLst>
           </p:cNvPr>
@@ -9404,7 +9404,7 @@
           <p:cNvPr id="4" name="Subtitle">
             <a:extLst>
               <a:ext uri="{FF2B5EF4-FFF2-40B4-BE49-F238E27FC236}">
-                <a16:creationId xmlns:a16="http://schemas.microsoft.com/office/drawing/2014/main" id="{5AE6413F-5388-7DF3-4B3E-BBAFC9A96D5A}"/>
+                <a16:creationId xmlns:a16="http://schemas.microsoft.com/office/drawing/2014/main" id="{95F2E0B9-0B71-8410-939A-62359A79C6F9}"/>
               </a:ext>
             </a:extLst>
           </p:cNvPr>
@@ -9477,7 +9477,7 @@
           <p:cNvPr id="5" name="직선 연결선 4">
             <a:extLst>
               <a:ext uri="{FF2B5EF4-FFF2-40B4-BE49-F238E27FC236}">
-                <a16:creationId xmlns:a16="http://schemas.microsoft.com/office/drawing/2014/main" id="{E71EAFE3-9906-BE13-C899-1F7E158839E5}"/>
+                <a16:creationId xmlns:a16="http://schemas.microsoft.com/office/drawing/2014/main" id="{349309D6-48D6-576B-8427-ED5DE856C9E4}"/>
               </a:ext>
             </a:extLst>
           </p:cNvPr>
@@ -9518,7 +9518,7 @@
           <p:cNvPr id="6" name="Applied Heading">
             <a:extLst>
               <a:ext uri="{FF2B5EF4-FFF2-40B4-BE49-F238E27FC236}">
-                <a16:creationId xmlns:a16="http://schemas.microsoft.com/office/drawing/2014/main" id="{DF9A413A-2995-DF4E-67C9-79CDC52B6974}"/>
+                <a16:creationId xmlns:a16="http://schemas.microsoft.com/office/drawing/2014/main" id="{537CC725-1C6A-C141-A306-85D235075A66}"/>
               </a:ext>
             </a:extLst>
           </p:cNvPr>
@@ -9561,7 +9561,7 @@
           <p:cNvPr id="7" name="Validation Heading">
             <a:extLst>
               <a:ext uri="{FF2B5EF4-FFF2-40B4-BE49-F238E27FC236}">
-                <a16:creationId xmlns:a16="http://schemas.microsoft.com/office/drawing/2014/main" id="{6487F0A9-2848-2421-5908-C83DF2137F0F}"/>
+                <a16:creationId xmlns:a16="http://schemas.microsoft.com/office/drawing/2014/main" id="{B8F4B276-B9DC-AB19-8906-E27A2649C3B3}"/>
               </a:ext>
             </a:extLst>
           </p:cNvPr>
@@ -9604,7 +9604,7 @@
           <p:cNvPr id="8" name="직선 연결선 7">
             <a:extLst>
               <a:ext uri="{FF2B5EF4-FFF2-40B4-BE49-F238E27FC236}">
-                <a16:creationId xmlns:a16="http://schemas.microsoft.com/office/drawing/2014/main" id="{FF22139D-4BA8-D17D-C841-2473527461BE}"/>
+                <a16:creationId xmlns:a16="http://schemas.microsoft.com/office/drawing/2014/main" id="{488342D3-1250-B80E-E7C1-9E555EF32B3D}"/>
               </a:ext>
             </a:extLst>
           </p:cNvPr>
@@ -9645,7 +9645,7 @@
           <p:cNvPr id="9" name="직선 연결선 8">
             <a:extLst>
               <a:ext uri="{FF2B5EF4-FFF2-40B4-BE49-F238E27FC236}">
-                <a16:creationId xmlns:a16="http://schemas.microsoft.com/office/drawing/2014/main" id="{590B44FE-2D3D-AEFF-E441-9DC88161FFD6}"/>
+                <a16:creationId xmlns:a16="http://schemas.microsoft.com/office/drawing/2014/main" id="{D3EC9C57-8D23-5578-93DD-9C1EE5DA12DF}"/>
               </a:ext>
             </a:extLst>
           </p:cNvPr>
@@ -9686,7 +9686,7 @@
           <p:cNvPr id="10" name="Applied">
             <a:extLst>
               <a:ext uri="{FF2B5EF4-FFF2-40B4-BE49-F238E27FC236}">
-                <a16:creationId xmlns:a16="http://schemas.microsoft.com/office/drawing/2014/main" id="{43B08A0F-4A95-8CF0-6A89-B6B12DB01A28}"/>
+                <a16:creationId xmlns:a16="http://schemas.microsoft.com/office/drawing/2014/main" id="{371998ED-C7F6-1B57-2BBA-4BAA17DDD30C}"/>
               </a:ext>
             </a:extLst>
           </p:cNvPr>
@@ -9946,7 +9946,7 @@
           <p:cNvPr id="11" name="Validation">
             <a:extLst>
               <a:ext uri="{FF2B5EF4-FFF2-40B4-BE49-F238E27FC236}">
-                <a16:creationId xmlns:a16="http://schemas.microsoft.com/office/drawing/2014/main" id="{A6A5809C-681F-7470-B4BA-61DEA983955A}"/>
+                <a16:creationId xmlns:a16="http://schemas.microsoft.com/office/drawing/2014/main" id="{4C6DD2A5-60A6-5FE4-C559-14C9D7A9B9D4}"/>
               </a:ext>
             </a:extLst>
           </p:cNvPr>
@@ -10176,7 +10176,7 @@
           <p:cNvPr id="12" name="Outcome">
             <a:extLst>
               <a:ext uri="{FF2B5EF4-FFF2-40B4-BE49-F238E27FC236}">
-                <a16:creationId xmlns:a16="http://schemas.microsoft.com/office/drawing/2014/main" id="{8F1B74F6-B47D-77FF-F7A7-54EF2CF84C9B}"/>
+                <a16:creationId xmlns:a16="http://schemas.microsoft.com/office/drawing/2014/main" id="{33F80B4A-D974-69A4-5886-F3AC05AD5FA5}"/>
               </a:ext>
             </a:extLst>
           </p:cNvPr>
@@ -10296,7 +10296,7 @@
           <p:cNvPr id="13" name="Footer">
             <a:extLst>
               <a:ext uri="{FF2B5EF4-FFF2-40B4-BE49-F238E27FC236}">
-                <a16:creationId xmlns:a16="http://schemas.microsoft.com/office/drawing/2014/main" id="{A9E70D2B-4770-D25F-E665-EB628349A422}"/>
+                <a16:creationId xmlns:a16="http://schemas.microsoft.com/office/drawing/2014/main" id="{453E7D91-C3EA-9C4D-485D-304C8D510982}"/>
               </a:ext>
             </a:extLst>
           </p:cNvPr>
@@ -10359,7 +10359,7 @@
           <p:cNvPr id="14" name="Slide Number">
             <a:extLst>
               <a:ext uri="{FF2B5EF4-FFF2-40B4-BE49-F238E27FC236}">
-                <a16:creationId xmlns:a16="http://schemas.microsoft.com/office/drawing/2014/main" id="{646250A4-2042-9357-9DE6-E16CFA1670AA}"/>
+                <a16:creationId xmlns:a16="http://schemas.microsoft.com/office/drawing/2014/main" id="{D0FF7E7A-F3AC-F00E-ABFB-58846EA90244}"/>
               </a:ext>
             </a:extLst>
           </p:cNvPr>
@@ -10408,7 +10408,7 @@
     </p:spTree>
     <p:extLst>
       <p:ext uri="{BB962C8B-B14F-4D97-AF65-F5344CB8AC3E}">
-        <p14:creationId xmlns:p14="http://schemas.microsoft.com/office/powerpoint/2010/main" val="19977418"/>
+        <p14:creationId xmlns:p14="http://schemas.microsoft.com/office/powerpoint/2010/main" val="112804116"/>
       </p:ext>
     </p:extLst>
   </p:cSld>
